--- a/papers/paper2-ids-selective/presentation.pptx
+++ b/papers/paper2-ids-selective/presentation.pptx
@@ -3150,7 +3150,7 @@
                   <a:srgbClr val="1F3355"/>
                 </a:solidFill>
               </a:rPr>
-              <a:t>Isolation Forest / one-class SVM separate DoS, Probe, U2R well (AUROC ≈ 0.90–0.99).</a:t>
+              <a:t>Isolation Forest / one-class SVM separate DoS, Probe, U2R well (AUROC ~ 0.90–0.99).</a:t>
             </a:r>
           </a:p>
           <a:p>
@@ -3165,7 +3165,7 @@
                   <a:srgbClr val="1F3355"/>
                 </a:solidFill>
               </a:rPr>
-              <a:t>R2L stays hardest (≈ 0.73–0.82) — its support most overlaps benign.</a:t>
+              <a:t>R2L stays hardest (~ 0.73–0.82) — its support most overlaps benign.</a:t>
             </a:r>
           </a:p>
           <a:p>
@@ -3275,8 +3275,8 @@
         </p:nvSpPr>
         <p:spPr>
           <a:xfrm>
-            <a:off x="0" y="1783080"/>
-            <a:ext cx="0" cy="4114800"/>
+            <a:off x="640080" y="1783080"/>
+            <a:ext cx="10927080" cy="4114800"/>
           </a:xfrm>
         </p:spPr>
         <p:txBody>
@@ -3309,7 +3309,7 @@
                   <a:srgbClr val="1F3355"/>
                 </a:solidFill>
               </a:rPr>
-              <a:t>Cross-day drift: Web detection 0.98 → 0.79; abstention rejects 0.95 of unknown Web — far more than R2L, because Web does not mimic benign.</a:t>
+              <a:t>Cross-day drift: Web detection 0.98 -&gt; 0.79; abstention rejects 0.95 of unknown Web — far more than R2L, because Web does not mimic benign.</a:t>
             </a:r>
           </a:p>
           <a:p>
@@ -3324,7 +3324,7 @@
                   <a:srgbClr val="1F3355"/>
                 </a:solidFill>
               </a:rPr>
-              <a:t>Cross-corpus 2017→2018 (27 shared features): accuracy 0.96 → 0.67, ECE 0.26; Infiltration (benign-mimicking) is again the blind spot (detected 0.14).</a:t>
+              <a:t>Cross-corpus 2017 -&gt; 2018 (27 shared features): accuracy 0.96 -&gt; 0.67, ECE 0.26; Infiltration (benign-mimicking) is again the blind spot (detected 0.14).</a:t>
             </a:r>
           </a:p>
         </p:txBody>
@@ -3385,8 +3385,8 @@
         </p:nvSpPr>
         <p:spPr>
           <a:xfrm>
-            <a:off x="0" y="1783080"/>
-            <a:ext cx="0" cy="4114800"/>
+            <a:off x="640080" y="1783080"/>
+            <a:ext cx="10927080" cy="4114800"/>
           </a:xfrm>
         </p:spPr>
         <p:txBody>
@@ -3404,7 +3404,7 @@
                   <a:srgbClr val="1F3355"/>
                 </a:solidFill>
               </a:rPr>
-              <a:t>Paired per-seed ΔAURC: max-softmax is statistically indistinguishable from richer signals; Mahalanobis is marginally better at error-ranking but worse at unknown-attack detection.</a:t>
+              <a:t>Paired per-seed Delta AURC: max-softmax is statistically indistinguishable from richer signals; Mahalanobis is marginally better at error-ranking but worse at unknown-attack detection.</a:t>
             </a:r>
           </a:p>
           <a:p>
@@ -3495,8 +3495,8 @@
         </p:nvSpPr>
         <p:spPr>
           <a:xfrm>
-            <a:off x="0" y="1783080"/>
-            <a:ext cx="0" cy="4114800"/>
+            <a:off x="640080" y="1783080"/>
+            <a:ext cx="10927080" cy="4114800"/>
           </a:xfrm>
         </p:spPr>
         <p:txBody>
@@ -3620,8 +3620,8 @@
         </p:nvSpPr>
         <p:spPr>
           <a:xfrm>
-            <a:off x="0" y="1783080"/>
-            <a:ext cx="0" cy="4114800"/>
+            <a:off x="640080" y="1783080"/>
+            <a:ext cx="10927080" cy="4114800"/>
           </a:xfrm>
         </p:spPr>
         <p:txBody>
@@ -3745,8 +3745,8 @@
         </p:nvSpPr>
         <p:spPr>
           <a:xfrm>
-            <a:off x="0" y="1783080"/>
-            <a:ext cx="0" cy="4114800"/>
+            <a:off x="640080" y="1783080"/>
+            <a:ext cx="10927080" cy="4114800"/>
           </a:xfrm>
         </p:spPr>
         <p:txBody>
@@ -3900,8 +3900,8 @@
         </p:nvSpPr>
         <p:spPr>
           <a:xfrm>
-            <a:off x="0" y="1783080"/>
-            <a:ext cx="0" cy="4114800"/>
+            <a:off x="640080" y="1783080"/>
+            <a:ext cx="10927080" cy="4114800"/>
           </a:xfrm>
         </p:spPr>
         <p:txBody>
@@ -3949,7 +3949,7 @@
                   <a:srgbClr val="1F3355"/>
                 </a:solidFill>
               </a:rPr>
-              <a:t>Split-conformal coverage: 0.93 in-distribution → 0.61 under the train–test shift (target 0.90).</a:t>
+              <a:t>Split-conformal coverage: 0.93 in-distribution -&gt; 0.61 under the train–test shift (target 0.90).</a:t>
             </a:r>
           </a:p>
           <a:p>
@@ -4297,8 +4297,8 @@
         </p:nvSpPr>
         <p:spPr>
           <a:xfrm>
-            <a:off x="0" y="1783080"/>
-            <a:ext cx="0" cy="4114800"/>
+            <a:off x="640080" y="1783080"/>
+            <a:ext cx="10927080" cy="4114800"/>
           </a:xfrm>
         </p:spPr>
         <p:txBody>
@@ -4407,8 +4407,8 @@
         </p:nvSpPr>
         <p:spPr>
           <a:xfrm>
-            <a:off x="0" y="1783080"/>
-            <a:ext cx="0" cy="4114800"/>
+            <a:off x="640080" y="1783080"/>
+            <a:ext cx="10927080" cy="4114800"/>
           </a:xfrm>
         </p:spPr>
         <p:txBody>
@@ -4547,8 +4547,8 @@
         </p:nvSpPr>
         <p:spPr>
           <a:xfrm>
-            <a:off x="0" y="1783080"/>
-            <a:ext cx="0" cy="4114800"/>
+            <a:off x="640080" y="1783080"/>
+            <a:ext cx="10927080" cy="4114800"/>
           </a:xfrm>
         </p:spPr>
         <p:txBody>
@@ -4672,8 +4672,8 @@
         </p:nvSpPr>
         <p:spPr>
           <a:xfrm>
-            <a:off x="0" y="1783080"/>
-            <a:ext cx="0" cy="4114800"/>
+            <a:off x="640080" y="1783080"/>
+            <a:ext cx="10927080" cy="4114800"/>
           </a:xfrm>
         </p:spPr>
         <p:txBody>
@@ -4842,7 +4842,7 @@
                   <a:srgbClr val="1F3355"/>
                 </a:solidFill>
               </a:rPr>
-              <a:t>DoS 0.86 → 0.60; Probe 0.79 → 0.43; U2R 0.18 → 0.05 when held out.</a:t>
+              <a:t>DoS 0.86 -&gt; 0.60; Probe 0.79 -&gt; 0.43; U2R 0.18 -&gt; 0.05 when held out.</a:t>
             </a:r>
           </a:p>
           <a:p>
@@ -5032,7 +5032,7 @@
                   <a:srgbClr val="555555"/>
                 </a:solidFill>
               </a:rPr>
-              <a:t>ECE: in-distribution → shifted test</a:t>
+              <a:t>ECE: in-distribution -&gt; shifted test</a:t>
             </a:r>
           </a:p>
         </p:txBody>
@@ -5104,7 +5104,7 @@
                   <a:srgbClr val="1F3355"/>
                 </a:solidFill>
               </a:rPr>
-              <a:t>In-distribution the same models are nearly perfectly calibrated (ECE ≲ 0.003); on the shifted test set ECE inflates to ≈ 0.16–0.22.</a:t>
+              <a:t>In-distribution the same models are nearly perfectly calibrated (ECE &lt;= 0.003); on the shifted test set ECE inflates to ~ 0.16–0.22.</a:t>
             </a:r>
           </a:p>
           <a:p>
@@ -5225,7 +5225,7 @@
                   <a:srgbClr val="1F3355"/>
                 </a:solidFill>
               </a:rPr>
-              <a:t>Tree ensembles: selective risk 0.20 → 0.11 at 80% coverage (AURC ≈ 0.05).</a:t>
+              <a:t>Tree ensembles: selective risk 0.20 -&gt; 0.11 at 80% coverage (AURC ~ 0.05).</a:t>
             </a:r>
           </a:p>
           <a:p>
@@ -5240,7 +5240,7 @@
                   <a:srgbClr val="1F3355"/>
                 </a:solidFill>
               </a:rPr>
-              <a:t>Logistic regression's confidence barely ranks its errors (AURC ≈ 0.23) — abstention buys little.</a:t>
+              <a:t>Logistic regression's confidence barely ranks its errors (AURC ~ 0.23) — abstention buys little.</a:t>
             </a:r>
           </a:p>
           <a:p>

--- a/papers/paper2-ids-selective/presentation.pptx
+++ b/papers/paper2-ids-selective/presentation.pptx
@@ -2844,7 +2844,7 @@
         </p:spPr>
         <p:txBody>
           <a:bodyPr wrap="square">
-            <a:spAutoFit/>
+            <a:normAutofit/>
           </a:bodyPr>
           <a:lstStyle/>
           <a:p>
@@ -2971,7 +2971,7 @@
         <p:spPr>
           <a:xfrm>
             <a:off x="8211312" y="1600200"/>
-            <a:ext cx="3950208" cy="4023360"/>
+            <a:ext cx="3950208" cy="4206240"/>
           </a:xfrm>
           <a:prstGeom prst="rect">
             <a:avLst/>
@@ -2980,7 +2980,7 @@
         </p:spPr>
         <p:txBody>
           <a:bodyPr wrap="square">
-            <a:spAutoFit/>
+            <a:normAutofit/>
           </a:bodyPr>
           <a:lstStyle/>
           <a:p>
@@ -2990,12 +2990,12 @@
               </a:spcAft>
             </a:pPr>
             <a:r>
-              <a:rPr sz="1700">
-                <a:solidFill>
-                  <a:srgbClr val="1F3355"/>
-                </a:solidFill>
-              </a:rPr>
-              <a:t>R2L's distribution sits on top of benign's — inside the benign envelope — for two independent benign-only detectors.</a:t>
+              <a:rPr sz="1600">
+                <a:solidFill>
+                  <a:srgbClr val="1F3355"/>
+                </a:solidFill>
+              </a:rPr>
+              <a:t>R2L’s records pile up right on top of the normal ones — inside the “looks-normal” region — for both independent novelty detectors.</a:t>
             </a:r>
           </a:p>
           <a:p>
@@ -3005,12 +3005,12 @@
               </a:spcAft>
             </a:pPr>
             <a:r>
-              <a:rPr sz="1700">
-                <a:solidFill>
-                  <a:srgbClr val="1F3355"/>
-                </a:solidFill>
-              </a:rPr>
-              <a:t>It mimics normal traffic, so neither abstention nor a benign-only novelty detector can cleanly flag it; DoS/Probe/U2R separate.</a:t>
+              <a:rPr sz="1600">
+                <a:solidFill>
+                  <a:srgbClr val="1F3355"/>
+                </a:solidFill>
+              </a:rPr>
+              <a:t>It mimics ordinary traffic, so neither abstaining nor a normal-only novelty check can cleanly flag it; DoS, Probe, and U2R clearly stand out.</a:t>
             </a:r>
           </a:p>
         </p:txBody>
@@ -3044,7 +3044,7 @@
                   <a:srgbClr val="555555"/>
                 </a:solidFill>
               </a:rPr>
-              <a:t>(a) joint (IF, OCSVM) novelty space; (b) per-family anomaly ridgeline.</a:t>
+              <a:t>(a) how unusual each record looks to two “normal-only” detectors; (b) the same, per family.</a:t>
             </a:r>
           </a:p>
         </p:txBody>
@@ -3088,7 +3088,7 @@
                   <a:srgbClr val="1F3355"/>
                 </a:solidFill>
               </a:rPr>
-              <a:t>Finding 5: a benign-only novelty stage partially closes it</a:t>
+              <a:t>Finding 5: a normal-only novelty stage partly closes the gap</a:t>
             </a:r>
           </a:p>
         </p:txBody>
@@ -3126,7 +3126,7 @@
         <p:spPr>
           <a:xfrm>
             <a:off x="7498080" y="1600200"/>
-            <a:ext cx="4663440" cy="4023360"/>
+            <a:ext cx="4663440" cy="4206240"/>
           </a:xfrm>
           <a:prstGeom prst="rect">
             <a:avLst/>
@@ -3135,7 +3135,7 @@
         </p:spPr>
         <p:txBody>
           <a:bodyPr wrap="square">
-            <a:spAutoFit/>
+            <a:normAutofit/>
           </a:bodyPr>
           <a:lstStyle/>
           <a:p>
@@ -3145,12 +3145,12 @@
               </a:spcAft>
             </a:pPr>
             <a:r>
-              <a:rPr sz="1700">
-                <a:solidFill>
-                  <a:srgbClr val="1F3355"/>
-                </a:solidFill>
-              </a:rPr>
-              <a:t>Isolation Forest / one-class SVM separate DoS, Probe, U2R well (AUROC ~ 0.90–0.99).</a:t>
+              <a:rPr sz="1600">
+                <a:solidFill>
+                  <a:srgbClr val="1F3355"/>
+                </a:solidFill>
+              </a:rPr>
+              <a:t>Trained only on normal traffic, Isolation Forest / one-class SVM separate DoS, Probe, U2R well (score ~ 0.90–0.99).</a:t>
             </a:r>
           </a:p>
           <a:p>
@@ -3160,12 +3160,12 @@
               </a:spcAft>
             </a:pPr>
             <a:r>
-              <a:rPr sz="1700">
-                <a:solidFill>
-                  <a:srgbClr val="1F3355"/>
-                </a:solidFill>
-              </a:rPr>
-              <a:t>R2L stays hardest (~ 0.73–0.82) — its support most overlaps benign.</a:t>
+              <a:rPr sz="1600">
+                <a:solidFill>
+                  <a:srgbClr val="1F3355"/>
+                </a:solidFill>
+              </a:rPr>
+              <a:t>R2L stays hardest (~ 0.73–0.82) — it overlaps normal traffic the most.</a:t>
             </a:r>
           </a:p>
           <a:p>
@@ -3175,12 +3175,12 @@
               </a:spcAft>
             </a:pPr>
             <a:r>
-              <a:rPr sz="1700">
-                <a:solidFill>
-                  <a:srgbClr val="1F3355"/>
-                </a:solidFill>
-              </a:rPr>
-              <a:t>Abstention and novelty catch different failure modes; combine them.</a:t>
+              <a:rPr sz="1600">
+                <a:solidFill>
+                  <a:srgbClr val="1F3355"/>
+                </a:solidFill>
+              </a:rPr>
+              <a:t>Abstaining and novelty detection catch different failures, so use both.</a:t>
             </a:r>
           </a:p>
         </p:txBody>
@@ -3214,7 +3214,7 @@
                   <a:srgbClr val="555555"/>
                 </a:solidFill>
               </a:rPr>
-              <a:t>Novelty AUROC vs. benign, per family, both detectors.</a:t>
+              <a:t>How well each attack family separates from normal traffic (1 = perfect, 0.5 = chance).</a:t>
             </a:r>
           </a:p>
         </p:txBody>
@@ -3258,7 +3258,7 @@
                   <a:srgbClr val="1F3355"/>
                 </a:solidFill>
               </a:rPr>
-              <a:t>Finding 6: calibration is task-dependent; the blind spot is not</a:t>
+              <a:t>Finding 6: the need for calibration depends on the task; the blind spot does not</a:t>
             </a:r>
           </a:p>
         </p:txBody>
@@ -3280,7 +3280,9 @@
           </a:xfrm>
         </p:spPr>
         <p:txBody>
-          <a:bodyPr wrap="square"/>
+          <a:bodyPr wrap="square">
+            <a:normAutofit/>
+          </a:bodyPr>
           <a:lstStyle/>
           <a:p>
             <a:pPr>
@@ -3289,12 +3291,12 @@
               </a:spcAft>
             </a:pPr>
             <a:r>
-              <a:rPr sz="2000">
-                <a:solidFill>
-                  <a:srgbClr val="1F3355"/>
-                </a:solidFill>
-              </a:rPr>
-              <a:t>CIC-IDS-2017 within-split is easy and well-calibrated (accuracy 0.9998, ECE 0.0001) — over-confidence is a property of the task, not an intrinsic flaw.</a:t>
+              <a:rPr sz="1800">
+                <a:solidFill>
+                  <a:srgbClr val="1F3355"/>
+                </a:solidFill>
+              </a:rPr>
+              <a:t>On CIC-IDS-2017 the within-day task is easy and already well-calibrated (accuracy 0.9998, calibration error 0.0001) — so over-confidence is a property of the task, not a built-in flaw.</a:t>
             </a:r>
           </a:p>
           <a:p>
@@ -3304,12 +3306,12 @@
               </a:spcAft>
             </a:pPr>
             <a:r>
-              <a:rPr sz="2000">
-                <a:solidFill>
-                  <a:srgbClr val="1F3355"/>
-                </a:solidFill>
-              </a:rPr>
-              <a:t>Cross-day drift: Web detection 0.98 -&gt; 0.79; abstention rejects 0.95 of unknown Web — far more than R2L, because Web does not mimic benign.</a:t>
+              <a:rPr sz="1800">
+                <a:solidFill>
+                  <a:srgbClr val="1F3355"/>
+                </a:solidFill>
+              </a:rPr>
+              <a:t>Train one day, test another (drift): Web detection 0.98 -&gt; 0.79, and abstaining now catches 0.95 of unknown Web — far more than R2L, because Web does not look like normal traffic.</a:t>
             </a:r>
           </a:p>
           <a:p>
@@ -3319,12 +3321,12 @@
               </a:spcAft>
             </a:pPr>
             <a:r>
-              <a:rPr sz="2000">
-                <a:solidFill>
-                  <a:srgbClr val="1F3355"/>
-                </a:solidFill>
-              </a:rPr>
-              <a:t>Cross-corpus 2017 -&gt; 2018 (27 shared features): accuracy 0.96 -&gt; 0.67, ECE 0.26; Infiltration (benign-mimicking) is again the blind spot (detected 0.14).</a:t>
+              <a:rPr sz="1800">
+                <a:solidFill>
+                  <a:srgbClr val="1F3355"/>
+                </a:solidFill>
+              </a:rPr>
+              <a:t>Across datasets (2017 -&gt; 2018, 27 shared features): accuracy 0.96 -&gt; 0.67, calibration error 0.26; Infiltration — which again mimics normal traffic — is once more the blind spot (caught 0.14).</a:t>
             </a:r>
           </a:p>
         </p:txBody>
@@ -3368,7 +3370,7 @@
                   <a:srgbClr val="1F3355"/>
                 </a:solidFill>
               </a:rPr>
-              <a:t>Which uncertainty signal? Can we guarantee coverage?</a:t>
+              <a:t>Which confidence signal? Can we promise a hit-rate?</a:t>
             </a:r>
           </a:p>
         </p:txBody>
@@ -3390,7 +3392,9 @@
           </a:xfrm>
         </p:spPr>
         <p:txBody>
-          <a:bodyPr wrap="square"/>
+          <a:bodyPr wrap="square">
+            <a:normAutofit/>
+          </a:bodyPr>
           <a:lstStyle/>
           <a:p>
             <a:pPr>
@@ -3399,12 +3403,12 @@
               </a:spcAft>
             </a:pPr>
             <a:r>
-              <a:rPr sz="2000">
-                <a:solidFill>
-                  <a:srgbClr val="1F3355"/>
-                </a:solidFill>
-              </a:rPr>
-              <a:t>Paired per-seed Delta AURC: max-softmax is statistically indistinguishable from richer signals; Mahalanobis is marginally better at error-ranking but worse at unknown-attack detection.</a:t>
+              <a:rPr sz="1800">
+                <a:solidFill>
+                  <a:srgbClr val="1F3355"/>
+                </a:solidFill>
+              </a:rPr>
+              <a:t>Comparing the signals fairly (same data, paired): the cheap top-probability is statistically tied with the fancier ones; the distance score is slightly better at ranking errors but worse at spotting unknown attacks.</a:t>
             </a:r>
           </a:p>
           <a:p>
@@ -3414,12 +3418,12 @@
               </a:spcAft>
             </a:pPr>
             <a:r>
-              <a:rPr sz="2000">
-                <a:solidFill>
-                  <a:srgbClr val="1F3355"/>
-                </a:solidFill>
-              </a:rPr>
-              <a:t>On tabular flow data the cheap max-softmax is a strong, well-rounded default — the leverage is in the abstention framework, not the estimator.</a:t>
+              <a:rPr sz="1800">
+                <a:solidFill>
+                  <a:srgbClr val="1F3355"/>
+                </a:solidFill>
+              </a:rPr>
+              <a:t>So on this kind of tabular traffic data, plain confidence is a strong default — the value is in the abstain framework, not the exact signal.</a:t>
             </a:r>
           </a:p>
           <a:p>
@@ -3429,12 +3433,12 @@
               </a:spcAft>
             </a:pPr>
             <a:r>
-              <a:rPr sz="2000">
-                <a:solidFill>
-                  <a:srgbClr val="1F3355"/>
-                </a:solidFill>
-              </a:rPr>
-              <a:t>Split conformal: empirical coverage 0.93 in-distribution but 0.61 under shift (target 0.90) — the guarantee erodes precisely when the deployment distribution moves.</a:t>
+              <a:rPr sz="1800">
+                <a:solidFill>
+                  <a:srgbClr val="1F3355"/>
+                </a:solidFill>
+              </a:rPr>
+              <a:t>Conformal prediction’s promised 90% hit-rate holds on training-like data (0.93) but falls to 0.61 once the traffic shifts — the guarantee breaks exactly when deployment changes.</a:t>
             </a:r>
           </a:p>
         </p:txBody>
@@ -3478,7 +3482,7 @@
                   <a:srgbClr val="1F3355"/>
                 </a:solidFill>
               </a:rPr>
-              <a:t>Discussion: an operational recipe</a:t>
+              <a:t>Discussion: a practical recipe</a:t>
             </a:r>
           </a:p>
         </p:txBody>
@@ -3500,7 +3504,9 @@
           </a:xfrm>
         </p:spPr>
         <p:txBody>
-          <a:bodyPr wrap="square"/>
+          <a:bodyPr wrap="square">
+            <a:normAutofit/>
+          </a:bodyPr>
           <a:lstStyle/>
           <a:p>
             <a:pPr>
@@ -3509,12 +3515,12 @@
               </a:spcAft>
             </a:pPr>
             <a:r>
-              <a:rPr sz="2000">
-                <a:solidFill>
-                  <a:srgbClr val="1F3355"/>
-                </a:solidFill>
-              </a:rPr>
-              <a:t>Deploy a model whose confidence is informative (low validation AURC — a tree ensemble, not the linear model).</a:t>
+              <a:rPr sz="1800">
+                <a:solidFill>
+                  <a:srgbClr val="1F3355"/>
+                </a:solidFill>
+              </a:rPr>
+              <a:t>Pick a model whose confidence is informative (good at ranking its own errors — a tree-based model, not the linear one).</a:t>
             </a:r>
           </a:p>
           <a:p>
@@ -3524,12 +3530,12 @@
               </a:spcAft>
             </a:pPr>
             <a:r>
-              <a:rPr sz="2000">
-                <a:solidFill>
-                  <a:srgbClr val="1F3355"/>
-                </a:solidFill>
-              </a:rPr>
-              <a:t>Set the operating coverage from the risk–coverage curve; route the abstained minority to a secondary control.</a:t>
+              <a:rPr sz="1800">
+                <a:solidFill>
+                  <a:srgbClr val="1F3355"/>
+                </a:solidFill>
+              </a:rPr>
+              <a:t>Choose how much to answer from the risk–coverage curve; send the refused cases to a human or a backup check.</a:t>
             </a:r>
           </a:p>
           <a:p>
@@ -3539,12 +3545,12 @@
               </a:spcAft>
             </a:pPr>
             <a:r>
-              <a:rPr sz="2000">
-                <a:solidFill>
-                  <a:srgbClr val="1F3355"/>
-                </a:solidFill>
-              </a:rPr>
-              <a:t>Monitor the abstention rate as a cheap, label-free drift signal.</a:t>
+              <a:rPr sz="1800">
+                <a:solidFill>
+                  <a:srgbClr val="1F3355"/>
+                </a:solidFill>
+              </a:rPr>
+              <a:t>Watch the abstain rate as a cheap, label-free warning that the traffic is drifting.</a:t>
             </a:r>
           </a:p>
           <a:p>
@@ -3554,12 +3560,12 @@
               </a:spcAft>
             </a:pPr>
             <a:r>
-              <a:rPr sz="2000">
-                <a:solidFill>
-                  <a:srgbClr val="1F3355"/>
-                </a:solidFill>
-              </a:rPr>
-              <a:t>Pair abstention with a benign-only novelty stage for the benign-mimicking attacks it cannot catch.</a:t>
+              <a:rPr sz="1800">
+                <a:solidFill>
+                  <a:srgbClr val="1F3355"/>
+                </a:solidFill>
+              </a:rPr>
+              <a:t>Add a normal-only novelty check for the look-like-normal attacks abstaining cannot catch.</a:t>
             </a:r>
           </a:p>
         </p:txBody>
@@ -3603,7 +3609,7 @@
                   <a:srgbClr val="1F3355"/>
                 </a:solidFill>
               </a:rPr>
-              <a:t>Conclusions and future research</a:t>
+              <a:t>Conclusions and future work</a:t>
             </a:r>
           </a:p>
         </p:txBody>
@@ -3625,7 +3631,9 @@
           </a:xfrm>
         </p:spPr>
         <p:txBody>
-          <a:bodyPr wrap="square"/>
+          <a:bodyPr wrap="square">
+            <a:normAutofit/>
+          </a:bodyPr>
           <a:lstStyle/>
           <a:p>
             <a:pPr>
@@ -3634,12 +3642,12 @@
               </a:spcAft>
             </a:pPr>
             <a:r>
-              <a:rPr sz="2000">
-                <a:solidFill>
-                  <a:srgbClr val="1F3355"/>
-                </a:solidFill>
-              </a:rPr>
-              <a:t>Selective prediction is a cheap, model-agnostic safety layer for ML intrusion detection, with clearly characterized limits.</a:t>
+              <a:rPr sz="1800">
+                <a:solidFill>
+                  <a:srgbClr val="1F3355"/>
+                </a:solidFill>
+              </a:rPr>
+              <a:t>Letting a detector abstain is a cheap, model-independent safety layer for ML intrusion detection, with clearly measured limits.</a:t>
             </a:r>
           </a:p>
           <a:p>
@@ -3649,12 +3657,12 @@
               </a:spcAft>
             </a:pPr>
             <a:r>
-              <a:rPr sz="2000">
-                <a:solidFill>
-                  <a:srgbClr val="1F3355"/>
-                </a:solidFill>
-              </a:rPr>
-              <a:t>Strong when unknown attacks are statistically distinguishable from benign traffic; weak when they mimic it.</a:t>
+              <a:rPr sz="1800">
+                <a:solidFill>
+                  <a:srgbClr val="1F3355"/>
+                </a:solidFill>
+              </a:rPr>
+              <a:t>It helps a lot when unknown attacks look different from normal traffic, and little when they mimic it.</a:t>
             </a:r>
           </a:p>
           <a:p>
@@ -3664,12 +3672,12 @@
               </a:spcAft>
             </a:pPr>
             <a:r>
-              <a:rPr sz="2000">
-                <a:solidFill>
-                  <a:srgbClr val="1F3355"/>
-                </a:solidFill>
-              </a:rPr>
-              <a:t>On an easy modern corpus calibration is fine, so the need for it is task-dependent — the blind spot is not.</a:t>
+              <a:rPr sz="1800">
+                <a:solidFill>
+                  <a:srgbClr val="1F3355"/>
+                </a:solidFill>
+              </a:rPr>
+              <a:t>On an easy modern dataset calibration is already fine, so the need for it depends on the task — but the look-like-normal blind spot does not.</a:t>
             </a:r>
           </a:p>
           <a:p>
@@ -3679,12 +3687,12 @@
               </a:spcAft>
             </a:pPr>
             <a:r>
-              <a:rPr sz="2000">
-                <a:solidFill>
-                  <a:srgbClr val="1F3355"/>
-                </a:solidFill>
-              </a:rPr>
-              <a:t>Future: full time-ordered evaluation, the label-corrected CIC-2017, and standardized NetFlow-v2 multi-network transfer.</a:t>
+              <a:rPr sz="1800">
+                <a:solidFill>
+                  <a:srgbClr val="1F3355"/>
+                </a:solidFill>
+              </a:rPr>
+              <a:t>Future: a full time-ordered evaluation, the label-corrected CIC-2017, and a shared NetFlow feature format for transfer across networks.</a:t>
             </a:r>
           </a:p>
         </p:txBody>
@@ -3750,7 +3758,9 @@
           </a:xfrm>
         </p:spPr>
         <p:txBody>
-          <a:bodyPr wrap="square"/>
+          <a:bodyPr wrap="square">
+            <a:normAutofit/>
+          </a:bodyPr>
           <a:lstStyle/>
           <a:p>
             <a:pPr>
@@ -3759,7 +3769,7 @@
               </a:spcAft>
             </a:pPr>
             <a:r>
-              <a:rPr sz="2000">
+              <a:rPr sz="1800">
                 <a:solidFill>
                   <a:srgbClr val="1F3355"/>
                 </a:solidFill>
@@ -3774,7 +3784,7 @@
               </a:spcAft>
             </a:pPr>
             <a:r>
-              <a:rPr sz="2000">
+              <a:rPr sz="1800">
                 <a:solidFill>
                   <a:srgbClr val="1F3355"/>
                 </a:solidFill>
@@ -3789,7 +3799,7 @@
               </a:spcAft>
             </a:pPr>
             <a:r>
-              <a:rPr sz="2000">
+              <a:rPr sz="1800">
                 <a:solidFill>
                   <a:srgbClr val="1F3355"/>
                 </a:solidFill>
@@ -3804,7 +3814,7 @@
               </a:spcAft>
             </a:pPr>
             <a:r>
-              <a:rPr sz="2000">
+              <a:rPr sz="1800">
                 <a:solidFill>
                   <a:srgbClr val="1F3355"/>
                 </a:solidFill>
@@ -3819,7 +3829,7 @@
               </a:spcAft>
             </a:pPr>
             <a:r>
-              <a:rPr sz="2000">
+              <a:rPr sz="1800">
                 <a:solidFill>
                   <a:srgbClr val="1F3355"/>
                 </a:solidFill>
@@ -3834,7 +3844,7 @@
               </a:spcAft>
             </a:pPr>
             <a:r>
-              <a:rPr sz="2000">
+              <a:rPr sz="1800">
                 <a:solidFill>
                   <a:srgbClr val="1F3355"/>
                 </a:solidFill>
@@ -3905,7 +3915,9 @@
           </a:xfrm>
         </p:spPr>
         <p:txBody>
-          <a:bodyPr wrap="square"/>
+          <a:bodyPr wrap="square">
+            <a:normAutofit/>
+          </a:bodyPr>
           <a:lstStyle/>
           <a:p>
             <a:pPr>
@@ -3914,7 +3926,7 @@
               </a:spcAft>
             </a:pPr>
             <a:r>
-              <a:rPr sz="2000">
+              <a:rPr sz="1800">
                 <a:solidFill>
                   <a:srgbClr val="1F3355"/>
                 </a:solidFill>
@@ -3929,7 +3941,7 @@
               </a:spcAft>
             </a:pPr>
             <a:r>
-              <a:rPr sz="2000">
+              <a:rPr sz="1800">
                 <a:solidFill>
                   <a:srgbClr val="1F3355"/>
                 </a:solidFill>
@@ -3944,7 +3956,7 @@
               </a:spcAft>
             </a:pPr>
             <a:r>
-              <a:rPr sz="2000">
+              <a:rPr sz="1800">
                 <a:solidFill>
                   <a:srgbClr val="1F3355"/>
                 </a:solidFill>
@@ -3959,7 +3971,7 @@
               </a:spcAft>
             </a:pPr>
             <a:r>
-              <a:rPr sz="2000">
+              <a:rPr sz="1800">
                 <a:solidFill>
                   <a:srgbClr val="1F3355"/>
                 </a:solidFill>
@@ -4036,7 +4048,7 @@
         </p:spPr>
         <p:txBody>
           <a:bodyPr wrap="square">
-            <a:spAutoFit/>
+            <a:normAutofit/>
           </a:bodyPr>
           <a:lstStyle/>
           <a:p>
@@ -4133,7 +4145,7 @@
         <p:spPr>
           <a:xfrm>
             <a:off x="7735824" y="1600200"/>
-            <a:ext cx="4425696" cy="4023360"/>
+            <a:ext cx="4425696" cy="4206240"/>
           </a:xfrm>
           <a:prstGeom prst="rect">
             <a:avLst/>
@@ -4142,7 +4154,7 @@
         </p:spPr>
         <p:txBody>
           <a:bodyPr wrap="square">
-            <a:spAutoFit/>
+            <a:normAutofit/>
           </a:bodyPr>
           <a:lstStyle/>
           <a:p>
@@ -4152,12 +4164,12 @@
               </a:spcAft>
             </a:pPr>
             <a:r>
-              <a:rPr sz="1700">
-                <a:solidFill>
-                  <a:srgbClr val="1F3355"/>
-                </a:solidFill>
-              </a:rPr>
-              <a:t>A detector that emits one hard label gives no signal of when to trust it — and fails silently on attacks absent from training.</a:t>
+              <a:rPr sz="1600">
+                <a:solidFill>
+                  <a:srgbClr val="1F3355"/>
+                </a:solidFill>
+              </a:rPr>
+              <a:t>A detector that outputs a single hard label (“attack” or “normal”) gives no signal of when to trust it — and stays silent on attacks it never saw in training.</a:t>
             </a:r>
           </a:p>
           <a:p>
@@ -4167,12 +4179,12 @@
               </a:spcAft>
             </a:pPr>
             <a:r>
-              <a:rPr sz="1700">
-                <a:solidFill>
-                  <a:srgbClr val="1F3355"/>
-                </a:solidFill>
-              </a:rPr>
-              <a:t>A reject option — abstain on low-confidence inputs, defer to an analyst or a novelty stage — would be more useful.</a:t>
+              <a:rPr sz="1600">
+                <a:solidFill>
+                  <a:srgbClr val="1F3355"/>
+                </a:solidFill>
+              </a:rPr>
+              <a:t>Better: let it abstain — say “I’m not sure” on low-confidence inputs and pass them to an analyst or a backup check. This is called selective prediction.</a:t>
             </a:r>
           </a:p>
           <a:p>
@@ -4182,12 +4194,12 @@
               </a:spcAft>
             </a:pPr>
             <a:r>
-              <a:rPr sz="1700">
-                <a:solidFill>
-                  <a:srgbClr val="1F3355"/>
-                </a:solidFill>
-              </a:rPr>
-              <a:t>Question: do off-the-shelf detectors know when they are wrong?</a:t>
+              <a:rPr sz="1600">
+                <a:solidFill>
+                  <a:srgbClr val="1F3355"/>
+                </a:solidFill>
+              </a:rPr>
+              <a:t>Question: do ordinary, off-the-shelf detectors know when they are wrong?</a:t>
             </a:r>
           </a:p>
           <a:p>
@@ -4197,12 +4209,12 @@
               </a:spcAft>
             </a:pPr>
             <a:r>
-              <a:rPr sz="1500">
+              <a:rPr sz="1400">
                 <a:solidFill>
                   <a:srgbClr val="555555"/>
                 </a:solidFill>
               </a:rPr>
-              <a:t>We propose no new detector; we evaluate existing ones.</a:t>
+              <a:t>We propose no new detector; we test the ones people already use.</a:t>
             </a:r>
           </a:p>
         </p:txBody>
@@ -4236,7 +4248,7 @@
                   <a:srgbClr val="555555"/>
                 </a:solidFill>
               </a:rPr>
-              <a:t>The selective-prediction (reject-option) wrapper we evaluate.</a:t>
+              <a:t>The selective-prediction (“reject-option”) wrapper we evaluate.</a:t>
             </a:r>
           </a:p>
         </p:txBody>
@@ -4280,7 +4292,7 @@
                   <a:srgbClr val="1F3355"/>
                 </a:solidFill>
               </a:rPr>
-              <a:t>Contributions (finding-first)</a:t>
+              <a:t>Contributions (most important first)</a:t>
             </a:r>
           </a:p>
         </p:txBody>
@@ -4302,7 +4314,9 @@
           </a:xfrm>
         </p:spPr>
         <p:txBody>
-          <a:bodyPr wrap="square"/>
+          <a:bodyPr wrap="square">
+            <a:normAutofit/>
+          </a:bodyPr>
           <a:lstStyle/>
           <a:p>
             <a:pPr>
@@ -4311,12 +4325,12 @@
               </a:spcAft>
             </a:pPr>
             <a:r>
-              <a:rPr sz="2000">
-                <a:solidFill>
-                  <a:srgbClr val="1F3355"/>
-                </a:solidFill>
-              </a:rPr>
-              <a:t>A controlled leave-one-family-out (LOFO) open-set protocol: detection collapses on held-out families; a confidence reject option covers only part; benign-mimicking R2L is a structural blind spot — missed by abstention and a benign-only novelty stage alike.</a:t>
+              <a:rPr sz="1800">
+                <a:solidFill>
+                  <a:srgbClr val="1F3355"/>
+                </a:solidFill>
+              </a:rPr>
+              <a:t>A controlled “leave-one-family-out” (LOFO) test — hide one whole attack family during training, then test on it (the unknown-attack, or “open-set,” setting). Detection of that family collapses; letting the model abstain recovers only part; and R2L — an attack that looks like ordinary traffic — is a built-in blind spot that neither abstaining nor a novelty detector can catch.</a:t>
             </a:r>
           </a:p>
           <a:p>
@@ -4326,12 +4340,12 @@
               </a:spcAft>
             </a:pPr>
             <a:r>
-              <a:rPr sz="2000">
-                <a:solidFill>
-                  <a:srgbClr val="1F3355"/>
-                </a:solidFill>
-              </a:rPr>
-              <a:t>Selective prediction cuts selective risk substantially — but only for models whose confidence ranks their errors (tree ensembles, not the linear model); conformal coverage erodes under shift.</a:t>
+              <a:rPr sz="1800">
+                <a:solidFill>
+                  <a:srgbClr val="1F3355"/>
+                </a:solidFill>
+              </a:rPr>
+              <a:t>Abstaining cuts the error among the inputs the model does answer — but only for models whose confidence actually ranks their mistakes (tree-based models, not the simple linear one).</a:t>
             </a:r>
           </a:p>
           <a:p>
@@ -4341,12 +4355,12 @@
               </a:spcAft>
             </a:pPr>
             <a:r>
-              <a:rPr sz="2000">
-                <a:solidFill>
-                  <a:srgbClr val="1F3355"/>
-                </a:solidFill>
-              </a:rPr>
-              <a:t>Mechanism: the three standard detectors are over-confident under distribution shift, and source-fit Platt scaling does not transfer.</a:t>
+              <a:rPr sz="1800">
+                <a:solidFill>
+                  <a:srgbClr val="1F3355"/>
+                </a:solidFill>
+              </a:rPr>
+              <a:t>Why: the detectors become over-confident once test traffic differs from training, and the standard confidence fix (Platt scaling) does not carry over.</a:t>
             </a:r>
           </a:p>
         </p:txBody>
@@ -4412,7 +4426,9 @@
           </a:xfrm>
         </p:spPr>
         <p:txBody>
-          <a:bodyPr wrap="square"/>
+          <a:bodyPr wrap="square">
+            <a:normAutofit/>
+          </a:bodyPr>
           <a:lstStyle/>
           <a:p>
             <a:pPr>
@@ -4421,12 +4437,12 @@
               </a:spcAft>
             </a:pPr>
             <a:r>
-              <a:rPr sz="2000">
-                <a:solidFill>
-                  <a:srgbClr val="1F3355"/>
-                </a:solidFill>
-              </a:rPr>
-              <a:t>Calibration: expected calibration error (15 bins), reliability diagrams, Platt scaling — fit on held-out TRAIN only (no test leakage, per Arp et al. 2022).</a:t>
+              <a:rPr sz="1800">
+                <a:solidFill>
+                  <a:srgbClr val="1F3355"/>
+                </a:solidFill>
+              </a:rPr>
+              <a:t>Calibration — does a model’s stated confidence match how often it is actually right? We measure the gap with expected calibration error (ECE), and try the standard fix (Platt scaling), fitted only on held-out training data so no test information leaks in.</a:t>
             </a:r>
           </a:p>
           <a:p>
@@ -4436,12 +4452,12 @@
               </a:spcAft>
             </a:pPr>
             <a:r>
-              <a:rPr sz="2000">
-                <a:solidFill>
-                  <a:srgbClr val="1F3355"/>
-                </a:solidFill>
-              </a:rPr>
-              <a:t>Selective prediction: confidence = max class probability; risk–coverage curve, area under it (AURC), and risk at 80% coverage.</a:t>
+              <a:rPr sz="1800">
+                <a:solidFill>
+                  <a:srgbClr val="1F3355"/>
+                </a:solidFill>
+              </a:rPr>
+              <a:t>Selective prediction — confidence = the model’s top class probability. The risk–coverage curve plots error against the fraction of inputs it chooses to answer; the area under it (AURC) summarizes it (lower is better).</a:t>
             </a:r>
           </a:p>
           <a:p>
@@ -4451,12 +4467,12 @@
               </a:spcAft>
             </a:pPr>
             <a:r>
-              <a:rPr sz="2000">
-                <a:solidFill>
-                  <a:srgbClr val="1F3355"/>
-                </a:solidFill>
-              </a:rPr>
-              <a:t>Open-set (LOFO): remove one attack family from training, retrain, measure detection and abstention on that family.</a:t>
+              <a:rPr sz="1800">
+                <a:solidFill>
+                  <a:srgbClr val="1F3355"/>
+                </a:solidFill>
+              </a:rPr>
+              <a:t>Open-set (LOFO): drop one attack family from training, retrain, and measure detection and abstaining on that unseen family.</a:t>
             </a:r>
           </a:p>
           <a:p>
@@ -4466,12 +4482,12 @@
               </a:spcAft>
             </a:pPr>
             <a:r>
-              <a:rPr sz="2000">
-                <a:solidFill>
-                  <a:srgbClr val="1F3355"/>
-                </a:solidFill>
-              </a:rPr>
-              <a:t>Conformal: split conformal prediction for distribution-free coverage under exchangeability.</a:t>
+              <a:rPr sz="1800">
+                <a:solidFill>
+                  <a:srgbClr val="1F3355"/>
+                </a:solidFill>
+              </a:rPr>
+              <a:t>Conformal prediction: a method that promises a chosen hit-rate, as long as new data looks like the old.</a:t>
             </a:r>
           </a:p>
           <a:p>
@@ -4481,12 +4497,12 @@
               </a:spcAft>
             </a:pPr>
             <a:r>
-              <a:rPr sz="2000">
-                <a:solidFill>
-                  <a:srgbClr val="1F3355"/>
-                </a:solidFill>
-              </a:rPr>
-              <a:t>Multi-seed (K = 15/10/8): means with 95% CIs; paired per-seed differences for equivalence claims.</a:t>
+              <a:rPr sz="1800">
+                <a:solidFill>
+                  <a:srgbClr val="1F3355"/>
+                </a:solidFill>
+              </a:rPr>
+              <a:t>Every number is a mean over many random repeats (“seeds”) with a 95% confidence interval — the range the true value likely lies in.</a:t>
             </a:r>
           </a:p>
         </p:txBody>
@@ -4530,7 +4546,7 @@
                   <a:srgbClr val="1F3355"/>
                 </a:solidFill>
               </a:rPr>
-              <a:t>Models, signals, and uncertainty estimators</a:t>
+              <a:t>Models, confidence signals, and novelty detectors</a:t>
             </a:r>
           </a:p>
         </p:txBody>
@@ -4552,7 +4568,9 @@
           </a:xfrm>
         </p:spPr>
         <p:txBody>
-          <a:bodyPr wrap="square"/>
+          <a:bodyPr wrap="square">
+            <a:normAutofit/>
+          </a:bodyPr>
           <a:lstStyle/>
           <a:p>
             <a:pPr>
@@ -4561,12 +4579,12 @@
               </a:spcAft>
             </a:pPr>
             <a:r>
-              <a:rPr sz="2000">
-                <a:solidFill>
-                  <a:srgbClr val="1F3355"/>
-                </a:solidFill>
-              </a:rPr>
-              <a:t>Detectors: logistic regression, random forest, histogram gradient boosting (scikit-learn) — deliberately standard; the subject is their confidence, not their architecture.</a:t>
+              <a:rPr sz="1800">
+                <a:solidFill>
+                  <a:srgbClr val="1F3355"/>
+                </a:solidFill>
+              </a:rPr>
+              <a:t>Detectors: logistic regression (a simple linear model), a random forest, and gradient boosting (both built from many decision trees) — deliberately ordinary; the subject is their confidence, not the architecture.</a:t>
             </a:r>
           </a:p>
           <a:p>
@@ -4576,12 +4594,12 @@
               </a:spcAft>
             </a:pPr>
             <a:r>
-              <a:rPr sz="2000">
-                <a:solidFill>
-                  <a:srgbClr val="1F3355"/>
-                </a:solidFill>
-              </a:rPr>
-              <a:t>Abstention signals compared: max-softmax (MSP), random-forest disagreement, Mahalanobis distance, k-NN distance.</a:t>
+              <a:rPr sz="1800">
+                <a:solidFill>
+                  <a:srgbClr val="1F3355"/>
+                </a:solidFill>
+              </a:rPr>
+              <a:t>Confidence signals compared: the top class probability (max-softmax), how much the forest’s trees disagree, and two “distance-from-normal” scores (Mahalanobis and nearest-neighbour).</a:t>
             </a:r>
           </a:p>
           <a:p>
@@ -4591,27 +4609,12 @@
               </a:spcAft>
             </a:pPr>
             <a:r>
-              <a:rPr sz="2000">
-                <a:solidFill>
-                  <a:srgbClr val="1F3355"/>
-                </a:solidFill>
-              </a:rPr>
-              <a:t>Benign-only novelty detectors: Isolation Forest, one-class SVM (trained on benign records only).</a:t>
-            </a:r>
-          </a:p>
-          <a:p>
-            <a:pPr>
-              <a:spcAft>
-                <a:spcPts val="400"/>
-              </a:spcAft>
-            </a:pPr>
-            <a:r>
-              <a:rPr sz="2000">
-                <a:solidFill>
-                  <a:srgbClr val="1F3355"/>
-                </a:solidFill>
-              </a:rPr>
-              <a:t>Post-hoc calibration: Platt (sigmoid) scaling.</a:t>
+              <a:rPr sz="1800">
+                <a:solidFill>
+                  <a:srgbClr val="1F3355"/>
+                </a:solidFill>
+              </a:rPr>
+              <a:t>Novelty detectors — trained only on normal traffic to flag anything unusual: Isolation Forest and a one-class SVM.</a:t>
             </a:r>
           </a:p>
         </p:txBody>
@@ -4677,7 +4680,9 @@
           </a:xfrm>
         </p:spPr>
         <p:txBody>
-          <a:bodyPr wrap="square"/>
+          <a:bodyPr wrap="square">
+            <a:normAutofit/>
+          </a:bodyPr>
           <a:lstStyle/>
           <a:p>
             <a:pPr>
@@ -4686,12 +4691,12 @@
               </a:spcAft>
             </a:pPr>
             <a:r>
-              <a:rPr sz="2000">
-                <a:solidFill>
-                  <a:srgbClr val="1F3355"/>
-                </a:solidFill>
-              </a:rPr>
-              <a:t>NSL-KDD: ~126k train / 22.5k test records, 41 features; families DoS, Probe, R2L, U2R. The published test split deliberately contains attack types absent from training (a built-in open-set test).</a:t>
+              <a:rPr sz="1800">
+                <a:solidFill>
+                  <a:srgbClr val="1F3355"/>
+                </a:solidFill>
+              </a:rPr>
+              <a:t>NSL-KDD — a public benchmark of network connections (~126k train / 22.5k test, 41 measured features each); attacks fall into four families (DoS, Probe, R2L, U2R). Its test set deliberately includes attack types missing from training — a built-in unknown-attack test.</a:t>
             </a:r>
           </a:p>
           <a:p>
@@ -4701,12 +4706,12 @@
               </a:spcAft>
             </a:pPr>
             <a:r>
-              <a:rPr sz="2000">
-                <a:solidFill>
-                  <a:srgbClr val="1F3355"/>
-                </a:solidFill>
-              </a:rPr>
-              <a:t>CIC-IDS-2017: a modern flow corpus (78 CICFlowMeter features), three days (DDoS, PortScan, Web).</a:t>
+              <a:rPr sz="1800">
+                <a:solidFill>
+                  <a:srgbClr val="1F3355"/>
+                </a:solidFill>
+              </a:rPr>
+              <a:t>CIC-IDS-2017 — a newer dataset of network “flows” (per-connection summaries, 78 features), over three days (DDoS, PortScan, Web attacks).</a:t>
             </a:r>
           </a:p>
           <a:p>
@@ -4716,12 +4721,12 @@
               </a:spcAft>
             </a:pPr>
             <a:r>
-              <a:rPr sz="2000">
-                <a:solidFill>
-                  <a:srgbClr val="1F3355"/>
-                </a:solidFill>
-              </a:rPr>
-              <a:t>CSE-CIC-IDS-2018: cross-corpus transfer on the 27 features whose names match exactly across the two releases.</a:t>
+              <a:rPr sz="1800">
+                <a:solidFill>
+                  <a:srgbClr val="1F3355"/>
+                </a:solidFill>
+              </a:rPr>
+              <a:t>CSE-CIC-IDS-2018 — a different network and year, used to test transfer on the 27 features the two datasets share by name.</a:t>
             </a:r>
           </a:p>
           <a:p>
@@ -4731,12 +4736,12 @@
               </a:spcAft>
             </a:pPr>
             <a:r>
-              <a:rPr sz="2000">
-                <a:solidFill>
-                  <a:srgbClr val="1F3355"/>
-                </a:solidFill>
-              </a:rPr>
-              <a:t>Canonical test partitions held fixed; resample the fit/calibration split and model seed across K seeds.</a:t>
+              <a:rPr sz="1800">
+                <a:solidFill>
+                  <a:srgbClr val="1F3355"/>
+                </a:solidFill>
+              </a:rPr>
+              <a:t>Each result averages many random repeats; the official test sets are kept fixed.</a:t>
             </a:r>
           </a:p>
         </p:txBody>
@@ -4818,7 +4823,7 @@
         <p:spPr>
           <a:xfrm>
             <a:off x="7498080" y="1600200"/>
-            <a:ext cx="4663440" cy="4023360"/>
+            <a:ext cx="4663440" cy="4206240"/>
           </a:xfrm>
           <a:prstGeom prst="rect">
             <a:avLst/>
@@ -4827,7 +4832,7 @@
         </p:spPr>
         <p:txBody>
           <a:bodyPr wrap="square">
-            <a:spAutoFit/>
+            <a:normAutofit/>
           </a:bodyPr>
           <a:lstStyle/>
           <a:p>
@@ -4837,12 +4842,12 @@
               </a:spcAft>
             </a:pPr>
             <a:r>
-              <a:rPr sz="1700">
-                <a:solidFill>
-                  <a:srgbClr val="1F3355"/>
-                </a:solidFill>
-              </a:rPr>
-              <a:t>DoS 0.86 -&gt; 0.60; Probe 0.79 -&gt; 0.43; U2R 0.18 -&gt; 0.05 when held out.</a:t>
+              <a:rPr sz="1600">
+                <a:solidFill>
+                  <a:srgbClr val="1F3355"/>
+                </a:solidFill>
+              </a:rPr>
+              <a:t>When a family is hidden during training, detection of it drops sharply: DoS 0.86 -&gt; 0.60; Probe 0.79 -&gt; 0.43; U2R 0.18 -&gt; 0.05.</a:t>
             </a:r>
           </a:p>
           <a:p>
@@ -4852,12 +4857,12 @@
               </a:spcAft>
             </a:pPr>
             <a:r>
-              <a:rPr sz="1700">
-                <a:solidFill>
-                  <a:srgbClr val="1F3355"/>
-                </a:solidFill>
-              </a:rPr>
-              <a:t>Abstention rejects only part of the unknowns (DoS 0.41, Probe 0.37).</a:t>
+              <a:rPr sz="1600">
+                <a:solidFill>
+                  <a:srgbClr val="1F3355"/>
+                </a:solidFill>
+              </a:rPr>
+              <a:t>Abstaining (refusing to answer) catches only part of the unknowns (DoS 0.41, Probe 0.37).</a:t>
             </a:r>
           </a:p>
           <a:p>
@@ -4867,12 +4872,12 @@
               </a:spcAft>
             </a:pPr>
             <a:r>
-              <a:rPr sz="1700">
-                <a:solidFill>
-                  <a:srgbClr val="1F3355"/>
-                </a:solidFill>
-              </a:rPr>
-              <a:t>R2L is low even when seen (0.07) — it mimics benign traffic.</a:t>
+              <a:rPr sz="1600">
+                <a:solidFill>
+                  <a:srgbClr val="1F3355"/>
+                </a:solidFill>
+              </a:rPr>
+              <a:t>R2L is barely caught even when seen (0.07) — it looks like normal traffic.</a:t>
             </a:r>
           </a:p>
         </p:txBody>
@@ -4906,7 +4911,7 @@
                   <a:srgbClr val="555555"/>
                 </a:solidFill>
               </a:rPr>
-              <a:t>Detection rate when a family is seen in training vs. held out (unknown).</a:t>
+              <a:t>Share of a family caught when it is seen in training vs. held out (unknown).</a:t>
             </a:r>
           </a:p>
         </p:txBody>
@@ -5032,7 +5037,7 @@
                   <a:srgbClr val="555555"/>
                 </a:solidFill>
               </a:rPr>
-              <a:t>ECE: in-distribution -&gt; shifted test</a:t>
+              <a:t>Calibration error: training-like -&gt; shifted test</a:t>
             </a:r>
           </a:p>
         </p:txBody>
@@ -5066,7 +5071,7 @@
                   <a:srgbClr val="555555"/>
                 </a:solidFill>
               </a:rPr>
-              <a:t>RF reliability (raw vs. Platt-scaled)</a:t>
+              <a:t>Forest: stated confidence vs. real accuracy</a:t>
             </a:r>
           </a:p>
         </p:txBody>
@@ -5079,8 +5084,8 @@
         </p:nvSpPr>
         <p:spPr>
           <a:xfrm>
-            <a:off x="548640" y="4754880"/>
-            <a:ext cx="11155680" cy="1005840"/>
+            <a:off x="548640" y="4709160"/>
+            <a:ext cx="11155680" cy="1143000"/>
           </a:xfrm>
           <a:prstGeom prst="rect">
             <a:avLst/>
@@ -5089,7 +5094,7 @@
         </p:spPr>
         <p:txBody>
           <a:bodyPr wrap="square">
-            <a:spAutoFit/>
+            <a:normAutofit/>
           </a:bodyPr>
           <a:lstStyle/>
           <a:p>
@@ -5099,12 +5104,12 @@
               </a:spcAft>
             </a:pPr>
             <a:r>
-              <a:rPr sz="1600">
-                <a:solidFill>
-                  <a:srgbClr val="1F3355"/>
-                </a:solidFill>
-              </a:rPr>
-              <a:t>In-distribution the same models are nearly perfectly calibrated (ECE &lt;= 0.003); on the shifted test set ECE inflates to ~ 0.16–0.22.</a:t>
+              <a:rPr sz="1500">
+                <a:solidFill>
+                  <a:srgbClr val="1F3355"/>
+                </a:solidFill>
+              </a:rPr>
+              <a:t>On data like the training set the models are almost perfectly calibrated (calibration error &lt;= 0.003); on the real test set — which adds unseen attacks — it jumps to ~ 0.16–0.22.</a:t>
             </a:r>
           </a:p>
           <a:p>
@@ -5114,12 +5119,12 @@
               </a:spcAft>
             </a:pPr>
             <a:r>
-              <a:rPr sz="1600">
-                <a:solidFill>
-                  <a:srgbClr val="1F3355"/>
-                </a:solidFill>
-              </a:rPr>
-              <a:t>Platt scaling fit on source data does NOT transfer — the over-confidence wedge remains.</a:t>
+              <a:rPr sz="1500">
+                <a:solidFill>
+                  <a:srgbClr val="1F3355"/>
+                </a:solidFill>
+              </a:rPr>
+              <a:t>Re-scaling confidence (Platt scaling) on the training distribution does NOT fix it — the over-confidence gap (shaded) remains.</a:t>
             </a:r>
           </a:p>
         </p:txBody>
@@ -5163,7 +5168,7 @@
                   <a:srgbClr val="1F3355"/>
                 </a:solidFill>
               </a:rPr>
-              <a:t>Finding 3: abstention helps — if confidence ranks errors</a:t>
+              <a:t>Finding 3: abstaining helps — if confidence ranks errors</a:t>
             </a:r>
           </a:p>
         </p:txBody>
@@ -5201,7 +5206,7 @@
         <p:spPr>
           <a:xfrm>
             <a:off x="7498080" y="1600200"/>
-            <a:ext cx="4663440" cy="4023360"/>
+            <a:ext cx="4663440" cy="4206240"/>
           </a:xfrm>
           <a:prstGeom prst="rect">
             <a:avLst/>
@@ -5210,7 +5215,7 @@
         </p:spPr>
         <p:txBody>
           <a:bodyPr wrap="square">
-            <a:spAutoFit/>
+            <a:normAutofit/>
           </a:bodyPr>
           <a:lstStyle/>
           <a:p>
@@ -5220,12 +5225,12 @@
               </a:spcAft>
             </a:pPr>
             <a:r>
-              <a:rPr sz="1700">
-                <a:solidFill>
-                  <a:srgbClr val="1F3355"/>
-                </a:solidFill>
-              </a:rPr>
-              <a:t>Tree ensembles: selective risk 0.20 -&gt; 0.11 at 80% coverage (AURC ~ 0.05).</a:t>
+              <a:rPr sz="1600">
+                <a:solidFill>
+                  <a:srgbClr val="1F3355"/>
+                </a:solidFill>
+              </a:rPr>
+              <a:t>Tree-based models: refusing the least-confident 20% cuts error 0.20 -&gt; 0.11 (area under the curve ~ 0.05; lower is better).</a:t>
             </a:r>
           </a:p>
           <a:p>
@@ -5235,12 +5240,12 @@
               </a:spcAft>
             </a:pPr>
             <a:r>
-              <a:rPr sz="1700">
-                <a:solidFill>
-                  <a:srgbClr val="1F3355"/>
-                </a:solidFill>
-              </a:rPr>
-              <a:t>Logistic regression's confidence barely ranks its errors (AURC ~ 0.23) — abstention buys little.</a:t>
+              <a:rPr sz="1600">
+                <a:solidFill>
+                  <a:srgbClr val="1F3355"/>
+                </a:solidFill>
+              </a:rPr>
+              <a:t>The linear model’s confidence barely ranks its mistakes (area ~ 0.23) — so abstaining buys little.</a:t>
             </a:r>
           </a:p>
           <a:p>
@@ -5250,12 +5255,12 @@
               </a:spcAft>
             </a:pPr>
             <a:r>
-              <a:rPr sz="1700">
-                <a:solidFill>
-                  <a:srgbClr val="1F3355"/>
-                </a:solidFill>
-              </a:rPr>
-              <a:t>Selective prediction is only as good as the underlying confidence signal.</a:t>
+              <a:rPr sz="1600">
+                <a:solidFill>
+                  <a:srgbClr val="1F3355"/>
+                </a:solidFill>
+              </a:rPr>
+              <a:t>Abstaining is only as good as the confidence signal behind it.</a:t>
             </a:r>
           </a:p>
         </p:txBody>
@@ -5289,7 +5294,7 @@
                   <a:srgbClr val="555555"/>
                 </a:solidFill>
               </a:rPr>
-              <a:t>Risk–coverage on NSL-KDD; ring marks the 80%-coverage operating point.</a:t>
+              <a:t>Error among answered cases vs. the fraction answered; ring = the 80%-answered point.</a:t>
             </a:r>
           </a:p>
         </p:txBody>

--- a/papers/paper2-ids-selective/presentation.pptx
+++ b/papers/paper2-ids-selective/presentation.pptx
@@ -26,6 +26,7 @@
     <p:sldId id="271" r:id="rId22"/>
     <p:sldId id="272" r:id="rId23"/>
     <p:sldId id="273" r:id="rId24"/>
+    <p:sldId id="274" r:id="rId25"/>
   </p:sldIdLst>
   <p:sldSz cx="12192000" cy="6858000"/>
   <p:notesSz cx="6858000" cy="9144000"/>
@@ -3258,26 +3259,50 @@
                   <a:srgbClr val="1F3355"/>
                 </a:solidFill>
               </a:rPr>
-              <a:t>Finding 6: the need for calibration depends on the task; the blind spot does not</a:t>
-            </a:r>
-          </a:p>
-        </p:txBody>
-      </p:sp>
-      <p:sp>
-        <p:nvSpPr>
-          <p:cNvPr id="3" name="Content Placeholder 2"/>
-          <p:cNvSpPr>
-            <a:spLocks noGrp="1"/>
-          </p:cNvSpPr>
-          <p:nvPr>
-            <p:ph idx="1"/>
-          </p:nvPr>
-        </p:nvSpPr>
-        <p:spPr>
-          <a:xfrm>
-            <a:off x="640080" y="1783080"/>
-            <a:ext cx="10927080" cy="4114800"/>
-          </a:xfrm>
+              <a:t>The recipe, measured end-to-end (combined gate)</a:t>
+            </a:r>
+          </a:p>
+        </p:txBody>
+      </p:sp>
+      <p:pic>
+        <p:nvPicPr>
+          <p:cNvPr id="3" name="Picture 2" descr="p2_combined_pipeline.png"/>
+          <p:cNvPicPr>
+            <a:picLocks noChangeAspect="1"/>
+          </p:cNvPicPr>
+          <p:nvPr/>
+        </p:nvPicPr>
+        <p:blipFill>
+          <a:blip r:embed="rId2"/>
+          <a:stretch>
+            <a:fillRect/>
+          </a:stretch>
+        </p:blipFill>
+        <p:spPr>
+          <a:xfrm>
+            <a:off x="1044508" y="1463040"/>
+            <a:ext cx="5683383" cy="4050792"/>
+          </a:xfrm>
+          <a:prstGeom prst="rect">
+            <a:avLst/>
+          </a:prstGeom>
+        </p:spPr>
+      </p:pic>
+      <p:sp>
+        <p:nvSpPr>
+          <p:cNvPr id="4" name="TextBox 3"/>
+          <p:cNvSpPr txBox="1"/>
+          <p:nvPr/>
+        </p:nvSpPr>
+        <p:spPr>
+          <a:xfrm>
+            <a:off x="7498080" y="1600200"/>
+            <a:ext cx="4663440" cy="4206240"/>
+          </a:xfrm>
+          <a:prstGeom prst="rect">
+            <a:avLst/>
+          </a:prstGeom>
+          <a:noFill/>
         </p:spPr>
         <p:txBody>
           <a:bodyPr wrap="square">
@@ -3285,48 +3310,82 @@
           </a:bodyPr>
           <a:lstStyle/>
           <a:p>
-            <a:pPr>
-              <a:spcAft>
-                <a:spcPts val="400"/>
-              </a:spcAft>
-            </a:pPr>
-            <a:r>
-              <a:rPr sz="1800">
-                <a:solidFill>
-                  <a:srgbClr val="1F3355"/>
-                </a:solidFill>
-              </a:rPr>
-              <a:t>On CIC-IDS-2017 the within-day task is easy and already well-calibrated (accuracy 0.9998, calibration error 0.0001) — so over-confidence is a property of the task, not a built-in flaw.</a:t>
-            </a:r>
-          </a:p>
-          <a:p>
-            <a:pPr>
-              <a:spcAft>
-                <a:spcPts val="400"/>
-              </a:spcAft>
-            </a:pPr>
-            <a:r>
-              <a:rPr sz="1800">
-                <a:solidFill>
-                  <a:srgbClr val="1F3355"/>
-                </a:solidFill>
-              </a:rPr>
-              <a:t>Train one day, test another (drift): Web detection 0.98 -&gt; 0.79, and abstaining now catches 0.95 of unknown Web — far more than R2L, because Web does not look like normal traffic.</a:t>
-            </a:r>
-          </a:p>
-          <a:p>
-            <a:pPr>
-              <a:spcAft>
-                <a:spcPts val="400"/>
-              </a:spcAft>
-            </a:pPr>
-            <a:r>
-              <a:rPr sz="1800">
-                <a:solidFill>
-                  <a:srgbClr val="1F3355"/>
-                </a:solidFill>
-              </a:rPr>
-              <a:t>Across datasets (2017 -&gt; 2018, 27 shared features): accuracy 0.96 -&gt; 0.67, calibration error 0.26; Infiltration — which again mimics normal traffic — is once more the blind spot (caught 0.14).</a:t>
+            <a:pPr algn="l">
+              <a:spcAft>
+                <a:spcPts val="400"/>
+              </a:spcAft>
+            </a:pPr>
+            <a:r>
+              <a:rPr sz="1600">
+                <a:solidFill>
+                  <a:srgbClr val="1F3355"/>
+                </a:solidFill>
+              </a:rPr>
+              <a:t>No single gate sees unknown look-like-normal R2L: the classifier alone recalls 0.003.</a:t>
+            </a:r>
+          </a:p>
+          <a:p>
+            <a:pPr algn="l">
+              <a:spcAft>
+                <a:spcPts val="400"/>
+              </a:spcAft>
+            </a:pPr>
+            <a:r>
+              <a:rPr sz="1600">
+                <a:solidFill>
+                  <a:srgbClr val="1F3355"/>
+                </a:solidFill>
+              </a:rPr>
+              <a:t>Add confidence abstention -&gt; 0.31; add a normal-only novelty stage -&gt; 0.40, at a 12% analyst review load.</a:t>
+            </a:r>
+          </a:p>
+          <a:p>
+            <a:pPr algn="l">
+              <a:spcAft>
+                <a:spcPts val="400"/>
+              </a:spcAft>
+            </a:pPr>
+            <a:r>
+              <a:rPr sz="1600">
+                <a:solidFill>
+                  <a:srgbClr val="1F3355"/>
+                </a:solidFill>
+              </a:rPr>
+              <a:t>The concrete payoff of the two-failure-modes story: stack the gates and recover a usable fraction at a bounded cost.</a:t>
+            </a:r>
+          </a:p>
+        </p:txBody>
+      </p:sp>
+      <p:sp>
+        <p:nvSpPr>
+          <p:cNvPr id="5" name="TextBox 4"/>
+          <p:cNvSpPr txBox="1"/>
+          <p:nvPr/>
+        </p:nvSpPr>
+        <p:spPr>
+          <a:xfrm>
+            <a:off x="320040" y="5513832"/>
+            <a:ext cx="7132320" cy="365760"/>
+          </a:xfrm>
+          <a:prstGeom prst="rect">
+            <a:avLst/>
+          </a:prstGeom>
+          <a:noFill/>
+        </p:spPr>
+        <p:txBody>
+          <a:bodyPr wrap="none">
+            <a:spAutoFit/>
+          </a:bodyPr>
+          <a:lstStyle/>
+          <a:p>
+            <a:pPr algn="ctr"/>
+            <a:r>
+              <a:rPr sz="1200" i="1">
+                <a:solidFill>
+                  <a:srgbClr val="555555"/>
+                </a:solidFill>
+              </a:rPr>
+              <a:t>Recall on unknown (held-out) R2L as gates are stacked; dashed = analyst review load.</a:t>
             </a:r>
           </a:p>
         </p:txBody>
@@ -3370,7 +3429,7 @@
                   <a:srgbClr val="1F3355"/>
                 </a:solidFill>
               </a:rPr>
-              <a:t>Which confidence signal? Can we promise a hit-rate?</a:t>
+              <a:t>Finding 6: calibration need is task-dependent; the blind spot recurs (3 datasets)</a:t>
             </a:r>
           </a:p>
         </p:txBody>
@@ -3408,7 +3467,7 @@
                   <a:srgbClr val="1F3355"/>
                 </a:solidFill>
               </a:rPr>
-              <a:t>Comparing the signals fairly (same data, paired): the cheap top-probability is statistically tied with the fancier ones; the distance score is slightly better at ranking errors but worse at spotting unknown attacks.</a:t>
+              <a:t>CIC-IDS-2017: the within-day task is easy and already well-calibrated (accuracy ~1.0, calibration error ~0.0001) -- over-confidence is a property of the task, not a built-in flaw.</a:t>
             </a:r>
           </a:p>
           <a:p>
@@ -3423,7 +3482,7 @@
                   <a:srgbClr val="1F3355"/>
                 </a:solidFill>
               </a:rPr>
-              <a:t>So on this kind of tabular traffic data, plain confidence is a strong default — the value is in the abstain framework, not the exact signal.</a:t>
+              <a:t>Drift (train one day, test another): Web detection 0.98 -&gt; 0.79, and abstaining catches 0.95 of unknown Web -- far more than R2L, because Web does not look like normal traffic.</a:t>
             </a:r>
           </a:p>
           <a:p>
@@ -3438,7 +3497,7 @@
                   <a:srgbClr val="1F3355"/>
                 </a:solidFill>
               </a:rPr>
-              <a:t>Conformal prediction’s promised 90% hit-rate holds on training-like data (0.93) but falls to 0.61 once the traffic shifts — the guarantee breaks exactly when deployment changes.</a:t>
+              <a:t>CIC-IDS-2018 (third dataset): Infiltration is the canonical look-like-normal family and repeats the R2L signature exactly -- well-calibrated (error 0.006), yet missed at the default cut (recall 0.25) while its score is discriminative (AUROC 0.71) and a per-family threshold recovers 0.39.</a:t>
             </a:r>
           </a:p>
         </p:txBody>
@@ -3482,7 +3541,7 @@
                   <a:srgbClr val="1F3355"/>
                 </a:solidFill>
               </a:rPr>
-              <a:t>Discussion: a practical recipe</a:t>
+              <a:t>Which confidence signal? Can we promise a hit-rate?</a:t>
             </a:r>
           </a:p>
         </p:txBody>
@@ -3520,7 +3579,7 @@
                   <a:srgbClr val="1F3355"/>
                 </a:solidFill>
               </a:rPr>
-              <a:t>Pick a model whose confidence is informative (good at ranking its own errors — a tree-based model, not the linear one).</a:t>
+              <a:t>Comparing the signals fairly (same data, paired): the cheap top-probability is statistically tied with the fancier ones; the distance score is slightly better at ranking errors but worse at spotting unknown attacks.</a:t>
             </a:r>
           </a:p>
           <a:p>
@@ -3535,7 +3594,7 @@
                   <a:srgbClr val="1F3355"/>
                 </a:solidFill>
               </a:rPr>
-              <a:t>Choose how much to answer from the risk–coverage curve; send the refused cases to a human or a backup check.</a:t>
+              <a:t>So on this kind of tabular traffic data, plain confidence is a strong default -- the value is in the abstain framework, not the exact signal. (Classical signals only; energy/ODIN-style scores need a neural net we deliberately avoid.)</a:t>
             </a:r>
           </a:p>
           <a:p>
@@ -3550,22 +3609,7 @@
                   <a:srgbClr val="1F3355"/>
                 </a:solidFill>
               </a:rPr>
-              <a:t>Watch the abstain rate as a cheap, label-free warning that the traffic is drifting.</a:t>
-            </a:r>
-          </a:p>
-          <a:p>
-            <a:pPr>
-              <a:spcAft>
-                <a:spcPts val="400"/>
-              </a:spcAft>
-            </a:pPr>
-            <a:r>
-              <a:rPr sz="1800">
-                <a:solidFill>
-                  <a:srgbClr val="1F3355"/>
-                </a:solidFill>
-              </a:rPr>
-              <a:t>Add a normal-only novelty check for the look-like-normal attacks abstaining cannot catch.</a:t>
+              <a:t>Conformal prediction's promised 90% hit-rate holds on training-like data (0.93) but falls to 0.61 once the traffic shifts -- the guarantee breaks exactly when deployment changes.</a:t>
             </a:r>
           </a:p>
         </p:txBody>
@@ -3609,7 +3653,7 @@
                   <a:srgbClr val="1F3355"/>
                 </a:solidFill>
               </a:rPr>
-              <a:t>Conclusions and future work</a:t>
+              <a:t>Discussion: a practical recipe</a:t>
             </a:r>
           </a:p>
         </p:txBody>
@@ -3647,7 +3691,7 @@
                   <a:srgbClr val="1F3355"/>
                 </a:solidFill>
               </a:rPr>
-              <a:t>Letting a detector abstain is a cheap, model-independent safety layer for ML intrusion detection, with clearly measured limits.</a:t>
+              <a:t>Pick a model whose confidence is informative (good at ranking its own errors — a tree-based model, not the linear one).</a:t>
             </a:r>
           </a:p>
           <a:p>
@@ -3662,7 +3706,7 @@
                   <a:srgbClr val="1F3355"/>
                 </a:solidFill>
               </a:rPr>
-              <a:t>It helps a lot when unknown attacks look different from normal traffic, and little when they mimic it.</a:t>
+              <a:t>Choose how much to answer from the risk–coverage curve; send the refused cases to a human or a backup check.</a:t>
             </a:r>
           </a:p>
           <a:p>
@@ -3677,7 +3721,7 @@
                   <a:srgbClr val="1F3355"/>
                 </a:solidFill>
               </a:rPr>
-              <a:t>On an easy modern dataset calibration is already fine, so the need for it depends on the task — but the look-like-normal blind spot does not.</a:t>
+              <a:t>Watch the abstain rate as a cheap, label-free warning that the traffic is drifting.</a:t>
             </a:r>
           </a:p>
           <a:p>
@@ -3692,7 +3736,7 @@
                   <a:srgbClr val="1F3355"/>
                 </a:solidFill>
               </a:rPr>
-              <a:t>Future: a full time-ordered evaluation, the label-corrected CIC-2017, and a shared NetFlow feature format for transfer across networks.</a:t>
+              <a:t>Add a normal-only novelty check for the look-like-normal attacks abstaining cannot catch.</a:t>
             </a:r>
           </a:p>
         </p:txBody>
@@ -3736,7 +3780,7 @@
                   <a:srgbClr val="1F3355"/>
                 </a:solidFill>
               </a:rPr>
-              <a:t>Selected references</a:t>
+              <a:t>Conclusions and future work</a:t>
             </a:r>
           </a:p>
         </p:txBody>
@@ -3774,7 +3818,7 @@
                   <a:srgbClr val="1F3355"/>
                 </a:solidFill>
               </a:rPr>
-              <a:t>M. Tavallaee et al., “A detailed analysis of the KDD Cup 99 / NSL-KDD data set,” 2009.</a:t>
+              <a:t>Detectors are over-confident under NSL-KDD's shift and not fixable by post-hoc calibration, yet well-calibrated on two modern datasets -- calibration need is task-dependent.</a:t>
             </a:r>
           </a:p>
           <a:p>
@@ -3789,7 +3833,7 @@
                   <a:srgbClr val="1F3355"/>
                 </a:solidFill>
               </a:rPr>
-              <a:t>C. Guo et al., “On calibration of modern neural networks,” 2017.</a:t>
+              <a:t>The second failure recurs on all three datasets but is an operating-point one: a single global threshold misses minority look-like-normal families whose score is in fact discriminable -- so the much-cited 'detection collapse' is mostly a thresholding artifact.</a:t>
             </a:r>
           </a:p>
           <a:p>
@@ -3804,7 +3848,7 @@
                   <a:srgbClr val="1F3355"/>
                 </a:solidFill>
               </a:rPr>
-              <a:t>Y. Geifman and R. El-Yaniv, selective prediction / risk–coverage, 2017; El-Yaniv &amp; Wiener, 2010.</a:t>
+              <a:t>Abstention lowers error where confidence ranks it, and stacking it with a normal-only novelty stage recovers much of the otherwise-missed look-like-normal traffic.</a:t>
             </a:r>
           </a:p>
           <a:p>
@@ -3819,37 +3863,7 @@
                   <a:srgbClr val="1F3355"/>
                 </a:solidFill>
               </a:rPr>
-              <a:t>D. Hendrycks and K. Gimpel, max-softmax baseline for misclassification/OOD, 2017.</a:t>
-            </a:r>
-          </a:p>
-          <a:p>
-            <a:pPr>
-              <a:spcAft>
-                <a:spcPts val="400"/>
-              </a:spcAft>
-            </a:pPr>
-            <a:r>
-              <a:rPr sz="1800">
-                <a:solidFill>
-                  <a:srgbClr val="1F3355"/>
-                </a:solidFill>
-              </a:rPr>
-              <a:t>D. Arp et al., “Dos and Don'ts of machine learning in computer security,” 2022.</a:t>
-            </a:r>
-          </a:p>
-          <a:p>
-            <a:pPr>
-              <a:spcAft>
-                <a:spcPts val="400"/>
-              </a:spcAft>
-            </a:pPr>
-            <a:r>
-              <a:rPr sz="1800">
-                <a:solidFill>
-                  <a:srgbClr val="1F3355"/>
-                </a:solidFill>
-              </a:rPr>
-              <a:t>A. Angelopoulos and S. Bates, conformal prediction, 2023.</a:t>
+              <a:t>Future: a full time-ordered evaluation, the label-corrected CIC-2017, and a shared NetFlow feature format for transfer across networks.</a:t>
             </a:r>
           </a:p>
         </p:txBody>
@@ -3893,7 +3907,7 @@
                   <a:srgbClr val="1F3355"/>
                 </a:solidFill>
               </a:rPr>
-              <a:t>Appendix: uncertainty signals on NSL-KDD</a:t>
+              <a:t>Selected references</a:t>
             </a:r>
           </a:p>
         </p:txBody>
@@ -3931,7 +3945,7 @@
                   <a:srgbClr val="1F3355"/>
                 </a:solidFill>
               </a:rPr>
-              <a:t>AURC (lower is better): max-softmax 0.060, Mahalanobis 0.058, k-NN 0.068, RF disagreement 0.060.</a:t>
+              <a:t>M. Tavallaee et al., “A detailed analysis of the KDD Cup 99 / NSL-KDD data set,” 2009.</a:t>
             </a:r>
           </a:p>
           <a:p>
@@ -3946,7 +3960,7 @@
                   <a:srgbClr val="1F3355"/>
                 </a:solidFill>
               </a:rPr>
-              <a:t>Mahalanobis is marginally better at error-ranking but significantly worse at unknown-attack separation than max-softmax.</a:t>
+              <a:t>C. Guo et al., “On calibration of modern neural networks,” 2017.</a:t>
             </a:r>
           </a:p>
           <a:p>
@@ -3961,7 +3975,7 @@
                   <a:srgbClr val="1F3355"/>
                 </a:solidFill>
               </a:rPr>
-              <a:t>Split-conformal coverage: 0.93 in-distribution -&gt; 0.61 under the train–test shift (target 0.90).</a:t>
+              <a:t>Y. Geifman and R. El-Yaniv, selective prediction / risk–coverage, 2017; El-Yaniv &amp; Wiener, 2010.</a:t>
             </a:r>
           </a:p>
           <a:p>
@@ -3976,7 +3990,37 @@
                   <a:srgbClr val="1F3355"/>
                 </a:solidFill>
               </a:rPr>
-              <a:t>All metrics: means over K seeds with 95% confidence intervals.</a:t>
+              <a:t>D. Hendrycks and K. Gimpel, max-softmax baseline for misclassification/OOD, 2017.</a:t>
+            </a:r>
+          </a:p>
+          <a:p>
+            <a:pPr>
+              <a:spcAft>
+                <a:spcPts val="400"/>
+              </a:spcAft>
+            </a:pPr>
+            <a:r>
+              <a:rPr sz="1800">
+                <a:solidFill>
+                  <a:srgbClr val="1F3355"/>
+                </a:solidFill>
+              </a:rPr>
+              <a:t>D. Arp et al., “Dos and Don'ts of machine learning in computer security,” 2022.</a:t>
+            </a:r>
+          </a:p>
+          <a:p>
+            <a:pPr>
+              <a:spcAft>
+                <a:spcPts val="400"/>
+              </a:spcAft>
+            </a:pPr>
+            <a:r>
+              <a:rPr sz="1800">
+                <a:solidFill>
+                  <a:srgbClr val="1F3355"/>
+                </a:solidFill>
+              </a:rPr>
+              <a:t>A. Angelopoulos and S. Bates, conformal prediction, 2023.</a:t>
             </a:r>
           </a:p>
         </p:txBody>
@@ -4009,6 +4053,133 @@
             <p:ph type="title"/>
           </p:nvPr>
         </p:nvSpPr>
+        <p:spPr/>
+        <p:txBody>
+          <a:bodyPr/>
+          <a:lstStyle/>
+          <a:p>
+            <a:r>
+              <a:rPr sz="3000" b="1">
+                <a:solidFill>
+                  <a:srgbClr val="1F3355"/>
+                </a:solidFill>
+              </a:rPr>
+              <a:t>Appendix: uncertainty signals on NSL-KDD</a:t>
+            </a:r>
+          </a:p>
+        </p:txBody>
+      </p:sp>
+      <p:sp>
+        <p:nvSpPr>
+          <p:cNvPr id="3" name="Content Placeholder 2"/>
+          <p:cNvSpPr>
+            <a:spLocks noGrp="1"/>
+          </p:cNvSpPr>
+          <p:nvPr>
+            <p:ph idx="1"/>
+          </p:nvPr>
+        </p:nvSpPr>
+        <p:spPr>
+          <a:xfrm>
+            <a:off x="640080" y="1783080"/>
+            <a:ext cx="10927080" cy="4114800"/>
+          </a:xfrm>
+        </p:spPr>
+        <p:txBody>
+          <a:bodyPr wrap="square">
+            <a:normAutofit/>
+          </a:bodyPr>
+          <a:lstStyle/>
+          <a:p>
+            <a:pPr>
+              <a:spcAft>
+                <a:spcPts val="400"/>
+              </a:spcAft>
+            </a:pPr>
+            <a:r>
+              <a:rPr sz="1800">
+                <a:solidFill>
+                  <a:srgbClr val="1F3355"/>
+                </a:solidFill>
+              </a:rPr>
+              <a:t>AURC (lower is better): max-softmax 0.060, Mahalanobis 0.058, k-NN 0.068, RF disagreement 0.060.</a:t>
+            </a:r>
+          </a:p>
+          <a:p>
+            <a:pPr>
+              <a:spcAft>
+                <a:spcPts val="400"/>
+              </a:spcAft>
+            </a:pPr>
+            <a:r>
+              <a:rPr sz="1800">
+                <a:solidFill>
+                  <a:srgbClr val="1F3355"/>
+                </a:solidFill>
+              </a:rPr>
+              <a:t>Mahalanobis is marginally better at error-ranking but significantly worse at unknown-attack separation than max-softmax.</a:t>
+            </a:r>
+          </a:p>
+          <a:p>
+            <a:pPr>
+              <a:spcAft>
+                <a:spcPts val="400"/>
+              </a:spcAft>
+            </a:pPr>
+            <a:r>
+              <a:rPr sz="1800">
+                <a:solidFill>
+                  <a:srgbClr val="1F3355"/>
+                </a:solidFill>
+              </a:rPr>
+              <a:t>Split-conformal coverage: 0.93 in-distribution -&gt; 0.61 under the train–test shift (target 0.90).</a:t>
+            </a:r>
+          </a:p>
+          <a:p>
+            <a:pPr>
+              <a:spcAft>
+                <a:spcPts val="400"/>
+              </a:spcAft>
+            </a:pPr>
+            <a:r>
+              <a:rPr sz="1800">
+                <a:solidFill>
+                  <a:srgbClr val="1F3355"/>
+                </a:solidFill>
+              </a:rPr>
+              <a:t>All metrics: means over K seeds with 95% confidence intervals.</a:t>
+            </a:r>
+          </a:p>
+        </p:txBody>
+      </p:sp>
+    </p:spTree>
+  </p:cSld>
+  <p:clrMapOvr>
+    <a:masterClrMapping/>
+  </p:clrMapOvr>
+</p:sld>
+</file>
+
+<file path=ppt/slides/slide19.xml><?xml version="1.0" encoding="utf-8"?>
+<p:sld xmlns:a="http://schemas.openxmlformats.org/drawingml/2006/main" xmlns:p="http://schemas.openxmlformats.org/presentationml/2006/main" xmlns:r="http://schemas.openxmlformats.org/officeDocument/2006/relationships">
+  <p:cSld>
+    <p:spTree>
+      <p:nvGrpSpPr>
+        <p:cNvPr id="1" name=""/>
+        <p:cNvGrpSpPr/>
+        <p:nvPr/>
+      </p:nvGrpSpPr>
+      <p:grpSpPr/>
+      <p:sp>
+        <p:nvSpPr>
+          <p:cNvPr id="2" name="Title 1"/>
+          <p:cNvSpPr>
+            <a:spLocks noGrp="1"/>
+          </p:cNvSpPr>
+          <p:nvPr>
+            <p:ph type="title"/>
+          </p:nvPr>
+        </p:nvSpPr>
         <p:spPr>
           <a:xfrm>
             <a:off x="0" y="2377440"/>
@@ -4292,7 +4463,7 @@
                   <a:srgbClr val="1F3355"/>
                 </a:solidFill>
               </a:rPr>
-              <a:t>Contributions (most important first)</a:t>
+              <a:t>Contributions: a dissociation between two failure modes</a:t>
             </a:r>
           </a:p>
         </p:txBody>
@@ -4330,7 +4501,7 @@
                   <a:srgbClr val="1F3355"/>
                 </a:solidFill>
               </a:rPr>
-              <a:t>A controlled “leave-one-family-out” (LOFO) test — hide one whole attack family during training, then test on it (the unknown-attack, or “open-set,” setting). Detection of that family collapses; letting the model abstain recovers only part; and R2L — an attack that looks like ordinary traffic — is a built-in blind spot that neither abstaining nor a novelty detector can catch.</a:t>
+              <a:t>Over-confidence is task-dependent: detectors are badly miscalibrated under NSL-KDD's shift and NO post-hoc fix (Platt, isotonic, or temperature scaling) transfers -- yet on two modern flow datasets the same task is well calibrated.</a:t>
             </a:r>
           </a:p>
           <a:p>
@@ -4345,7 +4516,7 @@
                   <a:srgbClr val="1F3355"/>
                 </a:solidFill>
               </a:rPr>
-              <a:t>Abstaining cuts the error among the inputs the model does answer — but only for models whose confidence actually ranks their mistakes (tree-based models, not the simple linear one).</a:t>
+              <a:t>The benign-mimicry blind spot is an operating-point failure, not a representational one, and it recurs across all three datasets. R2L is nearly missed at the default threshold (recall 0.06) yet its score is discriminative (AUROC 0.87); a per-family threshold recovers much of it (0.49). Class balancing does not help -- so the cause is the threshold, not class frequency.</a:t>
             </a:r>
           </a:p>
           <a:p>
@@ -4360,7 +4531,7 @@
                   <a:srgbClr val="1F3355"/>
                 </a:solidFill>
               </a:rPr>
-              <a:t>Why: the detectors become over-confident once test traffic differs from training, and the standard confidence fix (Platt scaling) does not carry over.</a:t>
+              <a:t>Selective prediction is useful but bounded: it helps only when confidence ranks errors, and the full recipe (classifier + abstention + novelty together) recovers unknown benign-mimicking attacks that any single gate misses.</a:t>
             </a:r>
           </a:p>
         </p:txBody>
@@ -4442,7 +4613,7 @@
                   <a:srgbClr val="1F3355"/>
                 </a:solidFill>
               </a:rPr>
-              <a:t>Calibration — does a model’s stated confidence match how often it is actually right? We measure the gap with expected calibration error (ECE), and try the standard fix (Platt scaling), fitted only on held-out training data so no test information leaks in.</a:t>
+              <a:t>Calibration -- does a model's stated confidence match how often it is right? We measure the gap with expected calibration error (ECE) and try three standard fixes (Platt, isotonic, and temperature scaling), each fit only on held-out training data so no test information leaks in.</a:t>
             </a:r>
           </a:p>
           <a:p>
@@ -4457,7 +4628,7 @@
                   <a:srgbClr val="1F3355"/>
                 </a:solidFill>
               </a:rPr>
-              <a:t>Selective prediction — confidence = the model’s top class probability. The risk–coverage curve plots error against the fraction of inputs it chooses to answer; the area under it (AURC) summarizes it (lower is better).</a:t>
+              <a:t>Selective prediction -- confidence = the model's top class probability. The risk-coverage curve plots error against the fraction answered; the area under it (AURC) summarizes it (lower is better).</a:t>
             </a:r>
           </a:p>
           <a:p>
@@ -4472,7 +4643,7 @@
                   <a:srgbClr val="1F3355"/>
                 </a:solidFill>
               </a:rPr>
-              <a:t>Open-set (LOFO): drop one attack family from training, retrain, and measure detection and abstaining on that unseen family.</a:t>
+              <a:t>Open-set (LOFO): drop one attack family from training, retrain, and measure detection on the unseen family. To separate a threshold artifact from true indistinguishability we also report threshold-free per-family detection AUROC.</a:t>
             </a:r>
           </a:p>
           <a:p>
@@ -4487,22 +4658,7 @@
                   <a:srgbClr val="1F3355"/>
                 </a:solidFill>
               </a:rPr>
-              <a:t>Conformal prediction: a method that promises a chosen hit-rate, as long as new data looks like the old.</a:t>
-            </a:r>
-          </a:p>
-          <a:p>
-            <a:pPr>
-              <a:spcAft>
-                <a:spcPts val="400"/>
-              </a:spcAft>
-            </a:pPr>
-            <a:r>
-              <a:rPr sz="1800">
-                <a:solidFill>
-                  <a:srgbClr val="1F3355"/>
-                </a:solidFill>
-              </a:rPr>
-              <a:t>Every number is a mean over many random repeats (“seeds”) with a 95% confidence interval — the range the true value likely lies in.</a:t>
+              <a:t>Honesty checks: a bootstrap over the (fixed) test set -- the seed-only intervals understate uncertainty about 5x -- and conformal prediction, which promises a hit-rate as long as new data looks like the old.</a:t>
             </a:r>
           </a:p>
         </p:txBody>
@@ -4785,14 +4941,14 @@
                   <a:srgbClr val="1F3355"/>
                 </a:solidFill>
               </a:rPr>
-              <a:t>Finding 1: detection collapses on unknown families (LOFO)</a:t>
+              <a:t>Finding 1: the blind spot is a threshold failure, not indistinguishability</a:t>
             </a:r>
           </a:p>
         </p:txBody>
       </p:sp>
       <p:pic>
         <p:nvPicPr>
-          <p:cNvPr id="3" name="Picture 2" descr="p2_openset_detection.png"/>
+          <p:cNvPr id="3" name="Picture 2" descr="p2_perfamily_auroc.png"/>
           <p:cNvPicPr>
             <a:picLocks noChangeAspect="1"/>
           </p:cNvPicPr>
@@ -4806,8 +4962,8 @@
         </p:blipFill>
         <p:spPr>
           <a:xfrm>
-            <a:off x="1281316" y="1463040"/>
-            <a:ext cx="5209768" cy="4050792"/>
+            <a:off x="1038370" y="1463040"/>
+            <a:ext cx="5695659" cy="4050792"/>
           </a:xfrm>
           <a:prstGeom prst="rect">
             <a:avLst/>
@@ -4847,7 +5003,7 @@
                   <a:srgbClr val="1F3355"/>
                 </a:solidFill>
               </a:rPr>
-              <a:t>When a family is hidden during training, detection of it drops sharply: DoS 0.86 -&gt; 0.60; Probe 0.79 -&gt; 0.43; U2R 0.18 -&gt; 0.05.</a:t>
+              <a:t>The most attackable reading -- 'R2L is just an unbalanced classifier at the default cut' -- is wrong about the cause. The attack score separates R2L from normal well above chance (AUROC 0.87 seen, 0.80 unknown).</a:t>
             </a:r>
           </a:p>
           <a:p>
@@ -4862,7 +5018,7 @@
                   <a:srgbClr val="1F3355"/>
                 </a:solidFill>
               </a:rPr>
-              <a:t>Abstaining (refusing to answer) catches only part of the unknowns (DoS 0.41, Probe 0.37).</a:t>
+              <a:t>At the global default threshold only 0.06 of R2L is flagged; class-balancing barely moves it (0.06); a per-family threshold recovers 0.49. So a single global operating point fails a minority, look-like-normal family.</a:t>
             </a:r>
           </a:p>
           <a:p>
@@ -4877,7 +5033,7 @@
                   <a:srgbClr val="1F3355"/>
                 </a:solidFill>
               </a:rPr>
-              <a:t>R2L is barely caught even when seen (0.07) — it looks like normal traffic.</a:t>
+              <a:t>Threshold-free, holding a family out of training costs little AUROC (DoS -0.06, R2L -0.07) -- so the dramatic 'detection collapse' on unknown families is largely a thresholding artifact.</a:t>
             </a:r>
           </a:p>
         </p:txBody>
@@ -4911,7 +5067,7 @@
                   <a:srgbClr val="555555"/>
                 </a:solidFill>
               </a:rPr>
-              <a:t>Share of a family caught when it is seen in training vs. held out (unknown).</a:t>
+              <a:t>Per-family detection AUROC (threshold-free), family seen vs. held out of training.</a:t>
             </a:r>
           </a:p>
         </p:txBody>
@@ -4955,14 +5111,14 @@
                   <a:srgbClr val="1F3355"/>
                 </a:solidFill>
               </a:rPr>
-              <a:t>Finding 2: detectors are over-confident under shift</a:t>
+              <a:t>Finding 2: over-confident under shift, and no calibrator fixes it</a:t>
             </a:r>
           </a:p>
         </p:txBody>
       </p:sp>
       <p:pic>
         <p:nvPicPr>
-          <p:cNvPr id="3" name="Picture 2" descr="p2_ece_shift.png"/>
+          <p:cNvPr id="3" name="Picture 2" descr="p2_calibration_methods.png"/>
           <p:cNvPicPr>
             <a:picLocks noChangeAspect="1"/>
           </p:cNvPicPr>
@@ -4976,48 +5132,24 @@
         </p:blipFill>
         <p:spPr>
           <a:xfrm>
-            <a:off x="1043588" y="1463040"/>
-            <a:ext cx="4405063" cy="2788920"/>
+            <a:off x="727668" y="1463040"/>
+            <a:ext cx="6317064" cy="4050792"/>
           </a:xfrm>
           <a:prstGeom prst="rect">
             <a:avLst/>
           </a:prstGeom>
         </p:spPr>
       </p:pic>
-      <p:pic>
-        <p:nvPicPr>
-          <p:cNvPr id="4" name="Picture 3" descr="p2_reliability_rf.png"/>
-          <p:cNvPicPr>
-            <a:picLocks noChangeAspect="1"/>
-          </p:cNvPicPr>
-          <p:nvPr/>
-        </p:nvPicPr>
-        <p:blipFill>
-          <a:blip r:embed="rId3"/>
-          <a:stretch>
-            <a:fillRect/>
-          </a:stretch>
-        </p:blipFill>
-        <p:spPr>
-          <a:xfrm>
-            <a:off x="7137455" y="1463040"/>
-            <a:ext cx="3738769" cy="2788920"/>
-          </a:xfrm>
-          <a:prstGeom prst="rect">
-            <a:avLst/>
-          </a:prstGeom>
-        </p:spPr>
-      </p:pic>
-      <p:sp>
-        <p:nvSpPr>
-          <p:cNvPr id="5" name="TextBox 4"/>
+      <p:sp>
+        <p:nvSpPr>
+          <p:cNvPr id="4" name="TextBox 3"/>
           <p:cNvSpPr txBox="1"/>
           <p:nvPr/>
         </p:nvSpPr>
         <p:spPr>
           <a:xfrm>
-            <a:off x="457200" y="4251960"/>
-            <a:ext cx="5577840" cy="365760"/>
+            <a:off x="7498080" y="1600200"/>
+            <a:ext cx="4663440" cy="4206240"/>
           </a:xfrm>
           <a:prstGeom prst="rect">
             <a:avLst/>
@@ -5025,33 +5157,67 @@
           <a:noFill/>
         </p:spPr>
         <p:txBody>
-          <a:bodyPr wrap="none">
-            <a:spAutoFit/>
+          <a:bodyPr wrap="square">
+            <a:normAutofit/>
           </a:bodyPr>
           <a:lstStyle/>
           <a:p>
-            <a:pPr algn="ctr"/>
-            <a:r>
-              <a:rPr sz="1200" i="1">
-                <a:solidFill>
-                  <a:srgbClr val="555555"/>
-                </a:solidFill>
-              </a:rPr>
-              <a:t>Calibration error: training-like -&gt; shifted test</a:t>
-            </a:r>
-          </a:p>
-        </p:txBody>
-      </p:sp>
-      <p:sp>
-        <p:nvSpPr>
-          <p:cNvPr id="6" name="TextBox 5"/>
+            <a:pPr algn="l">
+              <a:spcAft>
+                <a:spcPts val="400"/>
+              </a:spcAft>
+            </a:pPr>
+            <a:r>
+              <a:rPr sz="1600">
+                <a:solidFill>
+                  <a:srgbClr val="1F3355"/>
+                </a:solidFill>
+              </a:rPr>
+              <a:t>On data like the training set the models are nearly perfectly calibrated (error below 0.01); on the real shifted test set it jumps to about 0.16-0.22.</a:t>
+            </a:r>
+          </a:p>
+          <a:p>
+            <a:pPr algn="l">
+              <a:spcAft>
+                <a:spcPts val="400"/>
+              </a:spcAft>
+            </a:pPr>
+            <a:r>
+              <a:rPr sz="1600">
+                <a:solidFill>
+                  <a:srgbClr val="1F3355"/>
+                </a:solidFill>
+              </a:rPr>
+              <a:t>No post-hoc fix removes it: Platt, isotonic, and temperature scaling all stay high (every marker clusters at the top) -- each is fit on the source distribution.</a:t>
+            </a:r>
+          </a:p>
+          <a:p>
+            <a:pPr algn="l">
+              <a:spcAft>
+                <a:spcPts val="400"/>
+              </a:spcAft>
+            </a:pPr>
+            <a:r>
+              <a:rPr sz="1600">
+                <a:solidFill>
+                  <a:srgbClr val="1F3355"/>
+                </a:solidFill>
+              </a:rPr>
+              <a:t>Source-calibrated probabilities do not certify the deployed distribution -- which is why we turn to abstention (it needs only a usable confidence ranking).</a:t>
+            </a:r>
+          </a:p>
+        </p:txBody>
+      </p:sp>
+      <p:sp>
+        <p:nvSpPr>
+          <p:cNvPr id="5" name="TextBox 4"/>
           <p:cNvSpPr txBox="1"/>
           <p:nvPr/>
         </p:nvSpPr>
         <p:spPr>
           <a:xfrm>
-            <a:off x="6217920" y="4251960"/>
-            <a:ext cx="5577840" cy="365760"/>
+            <a:off x="320040" y="5513832"/>
+            <a:ext cx="7132320" cy="365760"/>
           </a:xfrm>
           <a:prstGeom prst="rect">
             <a:avLst/>
@@ -5071,60 +5237,7 @@
                   <a:srgbClr val="555555"/>
                 </a:solidFill>
               </a:rPr>
-              <a:t>Forest: stated confidence vs. real accuracy</a:t>
-            </a:r>
-          </a:p>
-        </p:txBody>
-      </p:sp>
-      <p:sp>
-        <p:nvSpPr>
-          <p:cNvPr id="7" name="TextBox 6"/>
-          <p:cNvSpPr txBox="1"/>
-          <p:nvPr/>
-        </p:nvSpPr>
-        <p:spPr>
-          <a:xfrm>
-            <a:off x="548640" y="4709160"/>
-            <a:ext cx="11155680" cy="1143000"/>
-          </a:xfrm>
-          <a:prstGeom prst="rect">
-            <a:avLst/>
-          </a:prstGeom>
-          <a:noFill/>
-        </p:spPr>
-        <p:txBody>
-          <a:bodyPr wrap="square">
-            <a:normAutofit/>
-          </a:bodyPr>
-          <a:lstStyle/>
-          <a:p>
-            <a:pPr algn="l">
-              <a:spcAft>
-                <a:spcPts val="400"/>
-              </a:spcAft>
-            </a:pPr>
-            <a:r>
-              <a:rPr sz="1500">
-                <a:solidFill>
-                  <a:srgbClr val="1F3355"/>
-                </a:solidFill>
-              </a:rPr>
-              <a:t>On data like the training set the models are almost perfectly calibrated (calibration error &lt;= 0.003); on the real test set — which adds unseen attacks — it jumps to ~ 0.16–0.22.</a:t>
-            </a:r>
-          </a:p>
-          <a:p>
-            <a:pPr algn="l">
-              <a:spcAft>
-                <a:spcPts val="400"/>
-              </a:spcAft>
-            </a:pPr>
-            <a:r>
-              <a:rPr sz="1500">
-                <a:solidFill>
-                  <a:srgbClr val="1F3355"/>
-                </a:solidFill>
-              </a:rPr>
-              <a:t>Re-scaling confidence (Platt scaling) on the training distribution does NOT fix it — the over-confidence gap (shaded) remains.</a:t>
+              <a:t>Calibration error on the shifted test set under four post-hoc calibrators (per model).</a:t>
             </a:r>
           </a:p>
         </p:txBody>

--- a/papers/paper2-ids-selective/presentation.pptx
+++ b/papers/paper2-ids-selective/presentation.pptx
@@ -3259,7 +3259,7 @@
                   <a:srgbClr val="1F3355"/>
                 </a:solidFill>
               </a:rPr>
-              <a:t>The recipe, measured end-to-end (combined gate)</a:t>
+              <a:t>The recipe, re-baselined honestly</a:t>
             </a:r>
           </a:p>
         </p:txBody>
@@ -3280,8 +3280,8 @@
         </p:blipFill>
         <p:spPr>
           <a:xfrm>
-            <a:off x="1044508" y="1463040"/>
-            <a:ext cx="5683383" cy="4050792"/>
+            <a:off x="1182737" y="1463040"/>
+            <a:ext cx="5406926" cy="4050792"/>
           </a:xfrm>
           <a:prstGeom prst="rect">
             <a:avLst/>
@@ -3321,7 +3321,7 @@
                   <a:srgbClr val="1F3355"/>
                 </a:solidFill>
               </a:rPr>
-              <a:t>No single gate sees unknown look-like-normal R2L: the classifier alone recalls 0.003.</a:t>
+              <a:t>The earlier 0.003 -&gt; 0.40 gain was measured against the argmax default -- a bad threshold for a minority family. We re-baseline against a single threshold TUNED to the same review budget.</a:t>
             </a:r>
           </a:p>
           <a:p>
@@ -3336,7 +3336,7 @@
                   <a:srgbClr val="1F3355"/>
                 </a:solidFill>
               </a:rPr>
-              <a:t>Add confidence abstention -&gt; 0.31; add a normal-only novelty stage -&gt; 0.40, at a 12% analyst review load.</a:t>
+              <a:t>At matched cost: argmax 0.00; a tuned threshold 0.51; the full stack (argmax+abstention+novelty) only 0.40 -- BELOW the tuned threshold (paired gap -0.11).</a:t>
             </a:r>
           </a:p>
           <a:p>
@@ -3351,7 +3351,7 @@
                   <a:srgbClr val="1F3355"/>
                 </a:solidFill>
               </a:rPr>
-              <a:t>The concrete payoff of the two-failure-modes story: stack the gates and recover a usable fraction at a bounded cost.</a:t>
+              <a:t>So the lever is the operating point, not the gates: stacking adds no net recall once the threshold is set to the budget. (Even so, about half of unknown R2L is still missed.)</a:t>
             </a:r>
           </a:p>
         </p:txBody>
@@ -3385,7 +3385,7 @@
                   <a:srgbClr val="555555"/>
                 </a:solidFill>
               </a:rPr>
-              <a:t>Recall on unknown (held-out) R2L as gates are stacked; dashed = analyst review load.</a:t>
+              <a:t>Unknown (held-out) R2L at a matched review budget: argmax vs tuned threshold vs full stack.</a:t>
             </a:r>
           </a:p>
         </p:txBody>
@@ -3848,7 +3848,7 @@
                   <a:srgbClr val="1F3355"/>
                 </a:solidFill>
               </a:rPr>
-              <a:t>Abstention lowers error where confidence ranks it, and stacking it with a normal-only novelty stage recovers much of the otherwise-missed look-like-normal traffic.</a:t>
+              <a:t>Abstention lowers error where confidence ranks it; and simply tuning the operating point to the analyst budget recovers much of the look-like-normal traffic the argmax default hides -- a stacked novelty gate adds no further recall at matched cost.</a:t>
             </a:r>
           </a:p>
           <a:p>
@@ -4531,7 +4531,7 @@
                   <a:srgbClr val="1F3355"/>
                 </a:solidFill>
               </a:rPr>
-              <a:t>Selective prediction is useful but bounded: it helps only when confidence ranks errors, and the full recipe (classifier + abstention + novelty together) recovers unknown benign-mimicking attacks that any single gate misses.</a:t>
+              <a:t>Selective prediction is useful but bounded: it helps only when confidence ranks errors; and on the benign-mimicking blind spot the lever is the OPERATING POINT -- a budget-tuned threshold recovers most of what argmax misses, while stacking abstention+novelty adds no gain at matched cost.</a:t>
             </a:r>
           </a:p>
         </p:txBody>

--- a/papers/paper2-ids-selective/presentation.pptx
+++ b/papers/paper2-ids-selective/presentation.pptx
@@ -27,6 +27,7 @@
     <p:sldId id="272" r:id="rId23"/>
     <p:sldId id="273" r:id="rId24"/>
     <p:sldId id="274" r:id="rId25"/>
+    <p:sldId id="275" r:id="rId26"/>
   </p:sldIdLst>
   <p:sldSz cx="12192000" cy="6858000"/>
   <p:notesSz cx="6858000" cy="9144000"/>
@@ -3429,26 +3430,50 @@
                   <a:srgbClr val="1F3355"/>
                 </a:solidFill>
               </a:rPr>
-              <a:t>Finding 6: calibration need is task-dependent; the blind spot recurs (3 datasets)</a:t>
-            </a:r>
-          </a:p>
-        </p:txBody>
-      </p:sp>
-      <p:sp>
-        <p:nvSpPr>
-          <p:cNvPr id="3" name="Content Placeholder 2"/>
-          <p:cNvSpPr>
-            <a:spLocks noGrp="1"/>
-          </p:cNvSpPr>
-          <p:nvPr>
-            <p:ph idx="1"/>
-          </p:nvPr>
-        </p:nvSpPr>
-        <p:spPr>
-          <a:xfrm>
-            <a:off x="640080" y="1783080"/>
-            <a:ext cx="10927080" cy="4114800"/>
-          </a:xfrm>
+              <a:t>Validating the fix: across budgets and a second corpus</a:t>
+            </a:r>
+          </a:p>
+        </p:txBody>
+      </p:sp>
+      <p:pic>
+        <p:nvPicPr>
+          <p:cNvPr id="3" name="Picture 2" descr="p2_validatefix.png"/>
+          <p:cNvPicPr>
+            <a:picLocks noChangeAspect="1"/>
+          </p:cNvPicPr>
+          <p:nvPr/>
+        </p:nvPicPr>
+        <p:blipFill>
+          <a:blip r:embed="rId2"/>
+          <a:stretch>
+            <a:fillRect/>
+          </a:stretch>
+        </p:blipFill>
+        <p:spPr>
+          <a:xfrm>
+            <a:off x="320040" y="2190536"/>
+            <a:ext cx="7132320" cy="2595800"/>
+          </a:xfrm>
+          <a:prstGeom prst="rect">
+            <a:avLst/>
+          </a:prstGeom>
+        </p:spPr>
+      </p:pic>
+      <p:sp>
+        <p:nvSpPr>
+          <p:cNvPr id="4" name="TextBox 3"/>
+          <p:cNvSpPr txBox="1"/>
+          <p:nvPr/>
+        </p:nvSpPr>
+        <p:spPr>
+          <a:xfrm>
+            <a:off x="7498080" y="1600200"/>
+            <a:ext cx="4663440" cy="4206240"/>
+          </a:xfrm>
+          <a:prstGeom prst="rect">
+            <a:avLst/>
+          </a:prstGeom>
+          <a:noFill/>
         </p:spPr>
         <p:txBody>
           <a:bodyPr wrap="square">
@@ -3456,48 +3481,82 @@
           </a:bodyPr>
           <a:lstStyle/>
           <a:p>
-            <a:pPr>
-              <a:spcAft>
-                <a:spcPts val="400"/>
-              </a:spcAft>
-            </a:pPr>
-            <a:r>
-              <a:rPr sz="1800">
-                <a:solidFill>
-                  <a:srgbClr val="1F3355"/>
-                </a:solidFill>
-              </a:rPr>
-              <a:t>CIC-IDS-2017: the within-day task is easy and already well-calibrated (accuracy ~1.0, calibration error ~0.0001) -- over-confidence is a property of the task, not a built-in flaw.</a:t>
-            </a:r>
-          </a:p>
-          <a:p>
-            <a:pPr>
-              <a:spcAft>
-                <a:spcPts val="400"/>
-              </a:spcAft>
-            </a:pPr>
-            <a:r>
-              <a:rPr sz="1800">
-                <a:solidFill>
-                  <a:srgbClr val="1F3355"/>
-                </a:solidFill>
-              </a:rPr>
-              <a:t>Drift (train one day, test another): Web detection 0.98 -&gt; 0.79, and abstaining catches 0.95 of unknown Web -- far more than R2L, because Web does not look like normal traffic.</a:t>
-            </a:r>
-          </a:p>
-          <a:p>
-            <a:pPr>
-              <a:spcAft>
-                <a:spcPts val="400"/>
-              </a:spcAft>
-            </a:pPr>
-            <a:r>
-              <a:rPr sz="1800">
-                <a:solidFill>
-                  <a:srgbClr val="1F3355"/>
-                </a:solidFill>
-              </a:rPr>
-              <a:t>CIC-IDS-2018 (third dataset): Infiltration is the canonical look-like-normal family and repeats the R2L signature exactly -- well-calibrated (error 0.006), yet missed at the default cut (recall 0.25) while its score is discriminative (AUROC 0.71) and a per-family threshold recovers 0.39.</a:t>
+            <a:pPr algn="l">
+              <a:spcAft>
+                <a:spcPts val="400"/>
+              </a:spcAft>
+            </a:pPr>
+            <a:r>
+              <a:rPr sz="1600">
+                <a:solidFill>
+                  <a:srgbClr val="1F3355"/>
+                </a:solidFill>
+              </a:rPr>
+              <a:t>Is the re-baseline a one-point fluke? We sweep three review budgets (5/10/20%) and add a second corpus -- CIC-2018 Infiltration, the look-like-normal family there.</a:t>
+            </a:r>
+          </a:p>
+          <a:p>
+            <a:pPr algn="l">
+              <a:spcAft>
+                <a:spcPts val="400"/>
+              </a:spcAft>
+            </a:pPr>
+            <a:r>
+              <a:rPr sz="1600">
+                <a:solidFill>
+                  <a:srgbClr val="1F3355"/>
+                </a:solidFill>
+              </a:rPr>
+              <a:t>The abstention+novelty stack beats a budget-tuned threshold in just 1 of 6 budget x corpus cells (CIC at 5%, +0.015); it loses the other five, decisively on unknown R2L (e.g. -0.39 at 20%).</a:t>
+            </a:r>
+          </a:p>
+          <a:p>
+            <a:pPr algn="l">
+              <a:spcAft>
+                <a:spcPts val="400"/>
+              </a:spcAft>
+            </a:pPr>
+            <a:r>
+              <a:rPr sz="1600">
+                <a:solidFill>
+                  <a:srgbClr val="1F3355"/>
+                </a:solidFill>
+              </a:rPr>
+              <a:t>So at equal analyst cost the stack adds no recall a tuned threshold doesn't already give -- and we tune the stack FAVOURABLY, not as a strawman; a harder-tuned threshold only widens the gap. (Headline gap: seed-paired -0.11; bootstrap -0.06, 95% CI [-0.10, 0.00].)</a:t>
+            </a:r>
+          </a:p>
+        </p:txBody>
+      </p:sp>
+      <p:sp>
+        <p:nvSpPr>
+          <p:cNvPr id="5" name="TextBox 4"/>
+          <p:cNvSpPr txBox="1"/>
+          <p:nvPr/>
+        </p:nvSpPr>
+        <p:spPr>
+          <a:xfrm>
+            <a:off x="320040" y="5513832"/>
+            <a:ext cx="7132320" cy="365760"/>
+          </a:xfrm>
+          <a:prstGeom prst="rect">
+            <a:avLst/>
+          </a:prstGeom>
+          <a:noFill/>
+        </p:spPr>
+        <p:txBody>
+          <a:bodyPr wrap="none">
+            <a:spAutoFit/>
+          </a:bodyPr>
+          <a:lstStyle/>
+          <a:p>
+            <a:pPr algn="ctr"/>
+            <a:r>
+              <a:rPr sz="1200" i="1">
+                <a:solidFill>
+                  <a:srgbClr val="555555"/>
+                </a:solidFill>
+              </a:rPr>
+              <a:t>Tuned threshold vs. the full stack at matched analyst budget, on unknown R2L and cross-corpus Infiltration.</a:t>
             </a:r>
           </a:p>
         </p:txBody>
@@ -3541,7 +3600,7 @@
                   <a:srgbClr val="1F3355"/>
                 </a:solidFill>
               </a:rPr>
-              <a:t>Which confidence signal? Can we promise a hit-rate?</a:t>
+              <a:t>Finding 6: calibration need is task-dependent; the blind spot recurs (3 datasets)</a:t>
             </a:r>
           </a:p>
         </p:txBody>
@@ -3579,7 +3638,7 @@
                   <a:srgbClr val="1F3355"/>
                 </a:solidFill>
               </a:rPr>
-              <a:t>Comparing the signals fairly (same data, paired): the cheap top-probability is statistically tied with the fancier ones; the distance score is slightly better at ranking errors but worse at spotting unknown attacks.</a:t>
+              <a:t>CIC-IDS-2017: the within-day task is easy and already well-calibrated (accuracy ~1.0, calibration error ~0.0001) -- over-confidence is a property of the task, not a built-in flaw.</a:t>
             </a:r>
           </a:p>
           <a:p>
@@ -3594,7 +3653,7 @@
                   <a:srgbClr val="1F3355"/>
                 </a:solidFill>
               </a:rPr>
-              <a:t>So on this kind of tabular traffic data, plain confidence is a strong default -- the value is in the abstain framework, not the exact signal. (Classical signals only; energy/ODIN-style scores need a neural net we deliberately avoid.)</a:t>
+              <a:t>Drift (train one day, test another): Web detection 0.98 -&gt; 0.79, and abstaining catches 0.95 of unknown Web -- far more than R2L, because Web does not look like normal traffic.</a:t>
             </a:r>
           </a:p>
           <a:p>
@@ -3609,7 +3668,7 @@
                   <a:srgbClr val="1F3355"/>
                 </a:solidFill>
               </a:rPr>
-              <a:t>Conformal prediction's promised 90% hit-rate holds on training-like data (0.93) but falls to 0.61 once the traffic shifts -- the guarantee breaks exactly when deployment changes.</a:t>
+              <a:t>CIC-IDS-2018 (third dataset): Infiltration is the canonical look-like-normal family and repeats the R2L signature exactly -- well-calibrated (error 0.006), yet missed at the default cut (recall 0.25) while its score is discriminative (AUROC 0.71) and a per-family threshold recovers 0.39.</a:t>
             </a:r>
           </a:p>
         </p:txBody>
@@ -3653,7 +3712,7 @@
                   <a:srgbClr val="1F3355"/>
                 </a:solidFill>
               </a:rPr>
-              <a:t>Discussion: a practical recipe</a:t>
+              <a:t>Which confidence signal? Can we promise a hit-rate?</a:t>
             </a:r>
           </a:p>
         </p:txBody>
@@ -3691,7 +3750,7 @@
                   <a:srgbClr val="1F3355"/>
                 </a:solidFill>
               </a:rPr>
-              <a:t>Pick a model whose confidence is informative (good at ranking its own errors — a tree-based model, not the linear one).</a:t>
+              <a:t>Comparing the signals fairly (same data, paired): the cheap top-probability is statistically tied with the fancier ones; the distance score is slightly better at ranking errors but worse at spotting unknown attacks.</a:t>
             </a:r>
           </a:p>
           <a:p>
@@ -3706,7 +3765,7 @@
                   <a:srgbClr val="1F3355"/>
                 </a:solidFill>
               </a:rPr>
-              <a:t>Choose how much to answer from the risk–coverage curve; send the refused cases to a human or a backup check.</a:t>
+              <a:t>So on this kind of tabular traffic data, plain confidence is a strong default -- the value is in the abstain framework, not the exact signal. (Classical signals only; energy/ODIN-style scores need a neural net we deliberately avoid.)</a:t>
             </a:r>
           </a:p>
           <a:p>
@@ -3721,22 +3780,7 @@
                   <a:srgbClr val="1F3355"/>
                 </a:solidFill>
               </a:rPr>
-              <a:t>Watch the abstain rate as a cheap, label-free warning that the traffic is drifting.</a:t>
-            </a:r>
-          </a:p>
-          <a:p>
-            <a:pPr>
-              <a:spcAft>
-                <a:spcPts val="400"/>
-              </a:spcAft>
-            </a:pPr>
-            <a:r>
-              <a:rPr sz="1800">
-                <a:solidFill>
-                  <a:srgbClr val="1F3355"/>
-                </a:solidFill>
-              </a:rPr>
-              <a:t>Add a normal-only novelty check for the look-like-normal attacks abstaining cannot catch.</a:t>
+              <a:t>Conformal prediction's promised 90% hit-rate holds on training-like data (0.93) but falls to 0.61 once the traffic shifts -- the guarantee breaks exactly when deployment changes.</a:t>
             </a:r>
           </a:p>
         </p:txBody>
@@ -3780,7 +3824,7 @@
                   <a:srgbClr val="1F3355"/>
                 </a:solidFill>
               </a:rPr>
-              <a:t>Conclusions and future work</a:t>
+              <a:t>Discussion: a practical recipe</a:t>
             </a:r>
           </a:p>
         </p:txBody>
@@ -3818,7 +3862,7 @@
                   <a:srgbClr val="1F3355"/>
                 </a:solidFill>
               </a:rPr>
-              <a:t>Detectors are over-confident under NSL-KDD's shift and not fixable by post-hoc calibration, yet well-calibrated on two modern datasets -- calibration need is task-dependent.</a:t>
+              <a:t>Pick a model whose confidence is informative (good at ranking its own errors — a tree-based model, not the linear one).</a:t>
             </a:r>
           </a:p>
           <a:p>
@@ -3833,7 +3877,7 @@
                   <a:srgbClr val="1F3355"/>
                 </a:solidFill>
               </a:rPr>
-              <a:t>The second failure recurs on all three datasets but is an operating-point one: a single global threshold misses minority look-like-normal families whose score is in fact discriminable -- so the much-cited 'detection collapse' is mostly a thresholding artifact.</a:t>
+              <a:t>Choose how much to answer from the risk–coverage curve; send the refused cases to a human or a backup check.</a:t>
             </a:r>
           </a:p>
           <a:p>
@@ -3848,7 +3892,7 @@
                   <a:srgbClr val="1F3355"/>
                 </a:solidFill>
               </a:rPr>
-              <a:t>Abstention lowers error where confidence ranks it; and simply tuning the operating point to the analyst budget recovers much of the look-like-normal traffic the argmax default hides -- a stacked novelty gate adds no further recall at matched cost.</a:t>
+              <a:t>Watch the abstain rate as a cheap, label-free warning that the traffic is drifting.</a:t>
             </a:r>
           </a:p>
           <a:p>
@@ -3863,7 +3907,7 @@
                   <a:srgbClr val="1F3355"/>
                 </a:solidFill>
               </a:rPr>
-              <a:t>Future: a full time-ordered evaluation, the label-corrected CIC-2017, and a shared NetFlow feature format for transfer across networks.</a:t>
+              <a:t>Add a normal-only novelty check for the look-like-normal attacks abstaining cannot catch.</a:t>
             </a:r>
           </a:p>
         </p:txBody>
@@ -3907,7 +3951,7 @@
                   <a:srgbClr val="1F3355"/>
                 </a:solidFill>
               </a:rPr>
-              <a:t>Selected references</a:t>
+              <a:t>Conclusions and future work</a:t>
             </a:r>
           </a:p>
         </p:txBody>
@@ -3945,7 +3989,7 @@
                   <a:srgbClr val="1F3355"/>
                 </a:solidFill>
               </a:rPr>
-              <a:t>M. Tavallaee et al., “A detailed analysis of the KDD Cup 99 / NSL-KDD data set,” 2009.</a:t>
+              <a:t>Detectors are over-confident under NSL-KDD's shift and not fixable by post-hoc calibration, yet well-calibrated on two modern datasets -- calibration need is task-dependent.</a:t>
             </a:r>
           </a:p>
           <a:p>
@@ -3960,7 +4004,7 @@
                   <a:srgbClr val="1F3355"/>
                 </a:solidFill>
               </a:rPr>
-              <a:t>C. Guo et al., “On calibration of modern neural networks,” 2017.</a:t>
+              <a:t>The second failure recurs on all three datasets but is an operating-point one: a single global threshold misses minority look-like-normal families whose score is in fact discriminable -- so the much-cited 'detection collapse' is mostly a thresholding artifact.</a:t>
             </a:r>
           </a:p>
           <a:p>
@@ -3975,7 +4019,7 @@
                   <a:srgbClr val="1F3355"/>
                 </a:solidFill>
               </a:rPr>
-              <a:t>Y. Geifman and R. El-Yaniv, selective prediction / risk–coverage, 2017; El-Yaniv &amp; Wiener, 2010.</a:t>
+              <a:t>Abstention lowers error where confidence ranks it; and simply tuning the operating point to the analyst budget recovers much of the look-like-normal traffic the argmax default hides -- a stacked novelty gate adds no further recall at matched cost.</a:t>
             </a:r>
           </a:p>
           <a:p>
@@ -3990,37 +4034,7 @@
                   <a:srgbClr val="1F3355"/>
                 </a:solidFill>
               </a:rPr>
-              <a:t>D. Hendrycks and K. Gimpel, max-softmax baseline for misclassification/OOD, 2017.</a:t>
-            </a:r>
-          </a:p>
-          <a:p>
-            <a:pPr>
-              <a:spcAft>
-                <a:spcPts val="400"/>
-              </a:spcAft>
-            </a:pPr>
-            <a:r>
-              <a:rPr sz="1800">
-                <a:solidFill>
-                  <a:srgbClr val="1F3355"/>
-                </a:solidFill>
-              </a:rPr>
-              <a:t>D. Arp et al., “Dos and Don'ts of machine learning in computer security,” 2022.</a:t>
-            </a:r>
-          </a:p>
-          <a:p>
-            <a:pPr>
-              <a:spcAft>
-                <a:spcPts val="400"/>
-              </a:spcAft>
-            </a:pPr>
-            <a:r>
-              <a:rPr sz="1800">
-                <a:solidFill>
-                  <a:srgbClr val="1F3355"/>
-                </a:solidFill>
-              </a:rPr>
-              <a:t>A. Angelopoulos and S. Bates, conformal prediction, 2023.</a:t>
+              <a:t>Future: a full time-ordered evaluation, the label-corrected CIC-2017, and a shared NetFlow feature format for transfer across networks.</a:t>
             </a:r>
           </a:p>
         </p:txBody>
@@ -4064,7 +4078,7 @@
                   <a:srgbClr val="1F3355"/>
                 </a:solidFill>
               </a:rPr>
-              <a:t>Appendix: uncertainty signals on NSL-KDD</a:t>
+              <a:t>Selected references</a:t>
             </a:r>
           </a:p>
         </p:txBody>
@@ -4102,7 +4116,7 @@
                   <a:srgbClr val="1F3355"/>
                 </a:solidFill>
               </a:rPr>
-              <a:t>AURC (lower is better): max-softmax 0.060, Mahalanobis 0.058, k-NN 0.068, RF disagreement 0.060.</a:t>
+              <a:t>M. Tavallaee et al., “A detailed analysis of the KDD Cup 99 / NSL-KDD data set,” 2009.</a:t>
             </a:r>
           </a:p>
           <a:p>
@@ -4117,7 +4131,7 @@
                   <a:srgbClr val="1F3355"/>
                 </a:solidFill>
               </a:rPr>
-              <a:t>Mahalanobis is marginally better at error-ranking but significantly worse at unknown-attack separation than max-softmax.</a:t>
+              <a:t>C. Guo et al., “On calibration of modern neural networks,” 2017.</a:t>
             </a:r>
           </a:p>
           <a:p>
@@ -4132,7 +4146,7 @@
                   <a:srgbClr val="1F3355"/>
                 </a:solidFill>
               </a:rPr>
-              <a:t>Split-conformal coverage: 0.93 in-distribution -&gt; 0.61 under the train–test shift (target 0.90).</a:t>
+              <a:t>Y. Geifman and R. El-Yaniv, selective prediction / risk–coverage, 2017; El-Yaniv &amp; Wiener, 2010.</a:t>
             </a:r>
           </a:p>
           <a:p>
@@ -4147,7 +4161,37 @@
                   <a:srgbClr val="1F3355"/>
                 </a:solidFill>
               </a:rPr>
-              <a:t>All metrics: means over K seeds with 95% confidence intervals.</a:t>
+              <a:t>D. Hendrycks and K. Gimpel, max-softmax baseline for misclassification/OOD, 2017.</a:t>
+            </a:r>
+          </a:p>
+          <a:p>
+            <a:pPr>
+              <a:spcAft>
+                <a:spcPts val="400"/>
+              </a:spcAft>
+            </a:pPr>
+            <a:r>
+              <a:rPr sz="1800">
+                <a:solidFill>
+                  <a:srgbClr val="1F3355"/>
+                </a:solidFill>
+              </a:rPr>
+              <a:t>D. Arp et al., “Dos and Don'ts of machine learning in computer security,” 2022.</a:t>
+            </a:r>
+          </a:p>
+          <a:p>
+            <a:pPr>
+              <a:spcAft>
+                <a:spcPts val="400"/>
+              </a:spcAft>
+            </a:pPr>
+            <a:r>
+              <a:rPr sz="1800">
+                <a:solidFill>
+                  <a:srgbClr val="1F3355"/>
+                </a:solidFill>
+              </a:rPr>
+              <a:t>A. Angelopoulos and S. Bates, conformal prediction, 2023.</a:t>
             </a:r>
           </a:p>
         </p:txBody>
@@ -4180,42 +4224,37 @@
             <p:ph type="title"/>
           </p:nvPr>
         </p:nvSpPr>
-        <p:spPr>
-          <a:xfrm>
-            <a:off x="0" y="2377440"/>
-            <a:ext cx="0" cy="1371600"/>
-          </a:xfrm>
-        </p:spPr>
+        <p:spPr/>
         <p:txBody>
           <a:bodyPr/>
           <a:lstStyle/>
           <a:p>
             <a:r>
-              <a:rPr sz="4000" b="1">
-                <a:solidFill>
-                  <a:srgbClr val="1F3355"/>
-                </a:solidFill>
-              </a:rPr>
-              <a:t>Thank you</a:t>
-            </a:r>
-          </a:p>
-        </p:txBody>
-      </p:sp>
-      <p:sp>
-        <p:nvSpPr>
-          <p:cNvPr id="3" name="TextBox 2"/>
-          <p:cNvSpPr txBox="1"/>
-          <p:nvPr/>
-        </p:nvSpPr>
-        <p:spPr>
-          <a:xfrm>
-            <a:off x="731520" y="3840480"/>
-            <a:ext cx="10698480" cy="1097280"/>
-          </a:xfrm>
-          <a:prstGeom prst="rect">
-            <a:avLst/>
-          </a:prstGeom>
-          <a:noFill/>
+              <a:rPr sz="3000" b="1">
+                <a:solidFill>
+                  <a:srgbClr val="1F3355"/>
+                </a:solidFill>
+              </a:rPr>
+              <a:t>Appendix: uncertainty signals on NSL-KDD</a:t>
+            </a:r>
+          </a:p>
+        </p:txBody>
+      </p:sp>
+      <p:sp>
+        <p:nvSpPr>
+          <p:cNvPr id="3" name="Content Placeholder 2"/>
+          <p:cNvSpPr>
+            <a:spLocks noGrp="1"/>
+          </p:cNvSpPr>
+          <p:nvPr>
+            <p:ph idx="1"/>
+          </p:nvPr>
+        </p:nvSpPr>
+        <p:spPr>
+          <a:xfrm>
+            <a:off x="640080" y="1783080"/>
+            <a:ext cx="10927080" cy="4114800"/>
+          </a:xfrm>
         </p:spPr>
         <p:txBody>
           <a:bodyPr wrap="square">
@@ -4223,7 +4262,7 @@
           </a:bodyPr>
           <a:lstStyle/>
           <a:p>
-            <a:pPr algn="ctr">
+            <a:pPr>
               <a:spcAft>
                 <a:spcPts val="400"/>
               </a:spcAft>
@@ -4234,7 +4273,52 @@
                   <a:srgbClr val="1F3355"/>
                 </a:solidFill>
               </a:rPr>
-              <a:t>Questions?  ·  LOFO protocol and analysis code released for verification.</a:t>
+              <a:t>AURC (lower is better): max-softmax 0.060, Mahalanobis 0.058, k-NN 0.068, RF disagreement 0.060.</a:t>
+            </a:r>
+          </a:p>
+          <a:p>
+            <a:pPr>
+              <a:spcAft>
+                <a:spcPts val="400"/>
+              </a:spcAft>
+            </a:pPr>
+            <a:r>
+              <a:rPr sz="1800">
+                <a:solidFill>
+                  <a:srgbClr val="1F3355"/>
+                </a:solidFill>
+              </a:rPr>
+              <a:t>Mahalanobis is marginally better at error-ranking but significantly worse at unknown-attack separation than max-softmax.</a:t>
+            </a:r>
+          </a:p>
+          <a:p>
+            <a:pPr>
+              <a:spcAft>
+                <a:spcPts val="400"/>
+              </a:spcAft>
+            </a:pPr>
+            <a:r>
+              <a:rPr sz="1800">
+                <a:solidFill>
+                  <a:srgbClr val="1F3355"/>
+                </a:solidFill>
+              </a:rPr>
+              <a:t>Split-conformal coverage: 0.93 in-distribution -&gt; 0.61 under the train–test shift (target 0.90).</a:t>
+            </a:r>
+          </a:p>
+          <a:p>
+            <a:pPr>
+              <a:spcAft>
+                <a:spcPts val="400"/>
+              </a:spcAft>
+            </a:pPr>
+            <a:r>
+              <a:rPr sz="1800">
+                <a:solidFill>
+                  <a:srgbClr val="1F3355"/>
+                </a:solidFill>
+              </a:rPr>
+              <a:t>All metrics: means over K seeds with 95% confidence intervals.</a:t>
             </a:r>
           </a:p>
         </p:txBody>
@@ -4432,6 +4516,93 @@
 </p:sld>
 </file>
 
+<file path=ppt/slides/slide20.xml><?xml version="1.0" encoding="utf-8"?>
+<p:sld xmlns:a="http://schemas.openxmlformats.org/drawingml/2006/main" xmlns:p="http://schemas.openxmlformats.org/presentationml/2006/main" xmlns:r="http://schemas.openxmlformats.org/officeDocument/2006/relationships">
+  <p:cSld>
+    <p:spTree>
+      <p:nvGrpSpPr>
+        <p:cNvPr id="1" name=""/>
+        <p:cNvGrpSpPr/>
+        <p:nvPr/>
+      </p:nvGrpSpPr>
+      <p:grpSpPr/>
+      <p:sp>
+        <p:nvSpPr>
+          <p:cNvPr id="2" name="Title 1"/>
+          <p:cNvSpPr>
+            <a:spLocks noGrp="1"/>
+          </p:cNvSpPr>
+          <p:nvPr>
+            <p:ph type="title"/>
+          </p:nvPr>
+        </p:nvSpPr>
+        <p:spPr>
+          <a:xfrm>
+            <a:off x="0" y="2377440"/>
+            <a:ext cx="0" cy="1371600"/>
+          </a:xfrm>
+        </p:spPr>
+        <p:txBody>
+          <a:bodyPr/>
+          <a:lstStyle/>
+          <a:p>
+            <a:r>
+              <a:rPr sz="4000" b="1">
+                <a:solidFill>
+                  <a:srgbClr val="1F3355"/>
+                </a:solidFill>
+              </a:rPr>
+              <a:t>Thank you</a:t>
+            </a:r>
+          </a:p>
+        </p:txBody>
+      </p:sp>
+      <p:sp>
+        <p:nvSpPr>
+          <p:cNvPr id="3" name="TextBox 2"/>
+          <p:cNvSpPr txBox="1"/>
+          <p:nvPr/>
+        </p:nvSpPr>
+        <p:spPr>
+          <a:xfrm>
+            <a:off x="731520" y="3840480"/>
+            <a:ext cx="10698480" cy="1097280"/>
+          </a:xfrm>
+          <a:prstGeom prst="rect">
+            <a:avLst/>
+          </a:prstGeom>
+          <a:noFill/>
+        </p:spPr>
+        <p:txBody>
+          <a:bodyPr wrap="square">
+            <a:normAutofit/>
+          </a:bodyPr>
+          <a:lstStyle/>
+          <a:p>
+            <a:pPr algn="ctr">
+              <a:spcAft>
+                <a:spcPts val="400"/>
+              </a:spcAft>
+            </a:pPr>
+            <a:r>
+              <a:rPr sz="1800">
+                <a:solidFill>
+                  <a:srgbClr val="1F3355"/>
+                </a:solidFill>
+              </a:rPr>
+              <a:t>Questions?  ·  LOFO protocol and analysis code released for verification.</a:t>
+            </a:r>
+          </a:p>
+        </p:txBody>
+      </p:sp>
+    </p:spTree>
+  </p:cSld>
+  <p:clrMapOvr>
+    <a:masterClrMapping/>
+  </p:clrMapOvr>
+</p:sld>
+</file>
+
 <file path=ppt/slides/slide3.xml><?xml version="1.0" encoding="utf-8"?>
 <p:sld xmlns:a="http://schemas.openxmlformats.org/drawingml/2006/main" xmlns:p="http://schemas.openxmlformats.org/presentationml/2006/main" xmlns:r="http://schemas.openxmlformats.org/officeDocument/2006/relationships">
   <p:cSld>
@@ -4613,7 +4784,7 @@
                   <a:srgbClr val="1F3355"/>
                 </a:solidFill>
               </a:rPr>
-              <a:t>Calibration -- does a model's stated confidence match how often it is right? We measure the gap with expected calibration error (ECE) and try three standard fixes (Platt, isotonic, and temperature scaling), each fit only on held-out training data so no test information leaks in.</a:t>
+              <a:t>Calibration -- does a model's stated confidence match how often it is right? We measure the gap with expected calibration error (ECE) -- and the Brier score, a proper scoring rule, agrees -- then try three standard fixes (Platt, isotonic, and temperature scaling), each fit only on held-out training data so no test information leaks in.</a:t>
             </a:r>
           </a:p>
           <a:p>
@@ -4741,6 +4912,21 @@
                 </a:solidFill>
               </a:rPr>
               <a:t>Detectors: logistic regression (a simple linear model), a random forest, and gradient boosting (both built from many decision trees) — deliberately ordinary; the subject is their confidence, not the architecture.</a:t>
+            </a:r>
+          </a:p>
+          <a:p>
+            <a:pPr lvl="1">
+              <a:spcAft>
+                <a:spcPts val="400"/>
+              </a:spcAft>
+            </a:pPr>
+            <a:r>
+              <a:rPr sz="1600">
+                <a:solidFill>
+                  <a:srgbClr val="555555"/>
+                </a:solidFill>
+              </a:rPr>
+              <a:t>A neural MLP is added as a supplementary fourth family in the model summary, to check the confidence-ranking finding generalizes beyond trees and the linear model.</a:t>
             </a:r>
           </a:p>
           <a:p>

--- a/papers/paper2-ids-selective/presentation.pptx
+++ b/papers/paper2-ids-selective/presentation.pptx
@@ -3281,8 +3281,8 @@
         </p:blipFill>
         <p:spPr>
           <a:xfrm>
-            <a:off x="1182737" y="1463040"/>
-            <a:ext cx="5406926" cy="4050792"/>
+            <a:off x="975979" y="1463040"/>
+            <a:ext cx="5820441" cy="4050792"/>
           </a:xfrm>
           <a:prstGeom prst="rect">
             <a:avLst/>

--- a/papers/paper2-ids-selective/presentation.pptx
+++ b/papers/paper2-ids-selective/presentation.pptx
@@ -2849,6 +2849,21 @@
             <a:normAutofit/>
           </a:bodyPr>
           <a:lstStyle/>
+          <a:p>
+            <a:pPr algn="ctr">
+              <a:spcAft>
+                <a:spcPts val="400"/>
+              </a:spcAft>
+            </a:pPr>
+            <a:r>
+              <a:rPr sz="1800">
+                <a:solidFill>
+                  <a:srgbClr val="1F3355"/>
+                </a:solidFill>
+              </a:rPr>
+              <a:t>The much-cited 'detection collapse' on unknown attacks is mostly a thresholding artifact</a:t>
+            </a:r>
+          </a:p>
           <a:p>
             <a:pPr algn="ctr">
               <a:spcAft>

--- a/papers/paper2-ids-selective/presentation.pptx
+++ b/papers/paper2-ids-selective/presentation.pptx
@@ -4440,6 +4440,21 @@
                 </a:solidFill>
               </a:rPr>
               <a:t>A detector that outputs a single hard label (“attack” or “normal”) gives no signal of when to trust it — and stays silent on attacks it never saw in training.</a:t>
+            </a:r>
+          </a:p>
+          <a:p>
+            <a:pPr algn="l">
+              <a:spcAft>
+                <a:spcPts val="400"/>
+              </a:spcAft>
+            </a:pPr>
+            <a:r>
+              <a:rPr sz="1600">
+                <a:solidFill>
+                  <a:srgbClr val="1F3355"/>
+                </a:solidFill>
+              </a:rPr>
+              <a:t>Why it matters: a missed novel attack reaches production before any analyst reviews it — exactly the case a single hard label handles worst.</a:t>
             </a:r>
           </a:p>
           <a:p>

--- a/papers/paper2-ids-selective/presentation.pptx
+++ b/papers/paper2-ids-selective/presentation.pptx
@@ -3012,7 +3012,7 @@
                   <a:srgbClr val="1F3355"/>
                 </a:solidFill>
               </a:rPr>
-              <a:t>R2L’s records pile up right on top of the normal ones — inside the “looks-normal” region — for both independent novelty detectors.</a:t>
+              <a:t>R2L’s records pile up right on top of the normal ones, inside the “looks-normal” region, for both independent novelty detectors.</a:t>
             </a:r>
           </a:p>
           <a:p>
@@ -3182,7 +3182,7 @@
                   <a:srgbClr val="1F3355"/>
                 </a:solidFill>
               </a:rPr>
-              <a:t>R2L stays hardest (~ 0.73–0.82) — it overlaps normal traffic the most.</a:t>
+              <a:t>R2L stays hardest (~ 0.73–0.82), it overlaps normal traffic the most.</a:t>
             </a:r>
           </a:p>
           <a:p>
@@ -3337,7 +3337,7 @@
                   <a:srgbClr val="1F3355"/>
                 </a:solidFill>
               </a:rPr>
-              <a:t>The earlier 0.003 -&gt; 0.40 gain was measured against the argmax default -- a bad threshold for a minority family. We re-baseline against a single threshold TUNED to the same review budget.</a:t>
+              <a:t>The earlier 0.003 -&gt; 0.40 gain was measured against the argmax default, a bad threshold for a minority family. We re-baseline against a single threshold TUNED to the same review budget.</a:t>
             </a:r>
           </a:p>
           <a:p>
@@ -3352,7 +3352,7 @@
                   <a:srgbClr val="1F3355"/>
                 </a:solidFill>
               </a:rPr>
-              <a:t>At matched cost: argmax 0.00; a tuned threshold 0.51; the full stack (argmax+abstention+novelty) only 0.40 -- BELOW the tuned threshold (paired gap -0.11).</a:t>
+              <a:t>At matched cost: argmax 0.00; a tuned threshold 0.51; the full stack (argmax+abstention+novelty) only 0.40, BELOW the tuned threshold (paired gap -0.11).</a:t>
             </a:r>
           </a:p>
           <a:p>
@@ -3507,7 +3507,7 @@
                   <a:srgbClr val="1F3355"/>
                 </a:solidFill>
               </a:rPr>
-              <a:t>Is the re-baseline a one-point fluke? We sweep three review budgets (5/10/20%) and add a second corpus -- CIC-2018 Infiltration, the look-like-normal family there.</a:t>
+              <a:t>Is the re-baseline a one-point fluke? We sweep three review budgets (5/10/20%) and add a second corpus, CIC-2018 Infiltration, the look-like-normal family there.</a:t>
             </a:r>
           </a:p>
           <a:p>
@@ -3537,7 +3537,7 @@
                   <a:srgbClr val="1F3355"/>
                 </a:solidFill>
               </a:rPr>
-              <a:t>So at equal analyst cost the stack adds no recall a tuned threshold doesn't already give -- and we tune the stack FAVOURABLY, not as a strawman; a harder-tuned threshold only widens the gap. (Headline gap: seed-paired -0.11; bootstrap -0.06, 95% CI [-0.10, 0.00].)</a:t>
+              <a:t>So at equal analyst cost the stack adds no recall a tuned threshold doesn't already give, and we tune the stack FAVOURABLY, not as a strawman; a harder-tuned threshold only widens the gap. (Headline gap: seed-paired -0.11; bootstrap -0.06, 95% CI [-0.10, 0.00].)</a:t>
             </a:r>
           </a:p>
         </p:txBody>
@@ -3653,7 +3653,7 @@
                   <a:srgbClr val="1F3355"/>
                 </a:solidFill>
               </a:rPr>
-              <a:t>CIC-IDS-2017: the within-day task is easy and already well-calibrated (accuracy ~1.0, calibration error ~0.0001) -- over-confidence is a property of the task, not a built-in flaw.</a:t>
+              <a:t>CIC-IDS-2017: the within-day task is easy and already well-calibrated (accuracy ~1.0, calibration error ~0.0001), over-confidence is a property of the task, not a built-in flaw.</a:t>
             </a:r>
           </a:p>
           <a:p>
@@ -3668,7 +3668,7 @@
                   <a:srgbClr val="1F3355"/>
                 </a:solidFill>
               </a:rPr>
-              <a:t>Drift (train one day, test another): Web detection 0.98 -&gt; 0.79, and abstaining catches 0.95 of unknown Web -- far more than R2L, because Web does not look like normal traffic.</a:t>
+              <a:t>Drift (train one day, test another): Web detection 0.98 -&gt; 0.79, and abstaining catches 0.95 of unknown Web, far more than R2L, because Web does not look like normal traffic.</a:t>
             </a:r>
           </a:p>
           <a:p>
@@ -3683,7 +3683,7 @@
                   <a:srgbClr val="1F3355"/>
                 </a:solidFill>
               </a:rPr>
-              <a:t>CIC-IDS-2018 (third dataset): Infiltration is the canonical look-like-normal family and repeats the R2L signature exactly -- well-calibrated (error 0.006), yet missed at the default cut (recall 0.25) while its score is discriminative (AUROC 0.71) and a per-family threshold recovers 0.39.</a:t>
+              <a:t>CIC-IDS-2018 (third dataset): Infiltration is the canonical look-like-normal family and repeats the R2L signature exactly: well-calibrated (error 0.006), yet missed at the default cut (recall 0.25) while its score is discriminative (AUROC 0.71) and a per-family threshold recovers 0.39.</a:t>
             </a:r>
           </a:p>
         </p:txBody>
@@ -3780,7 +3780,7 @@
                   <a:srgbClr val="1F3355"/>
                 </a:solidFill>
               </a:rPr>
-              <a:t>So on this kind of tabular traffic data, plain confidence is a strong default -- the value is in the abstain framework, not the exact signal. (Classical signals only; energy/ODIN-style scores need a neural net we deliberately avoid.)</a:t>
+              <a:t>So on this kind of tabular traffic data, plain confidence is a strong default: the value is in the abstain framework, not the exact signal. (Classical signals only; energy/ODIN-style scores need a neural net we deliberately avoid.)</a:t>
             </a:r>
           </a:p>
           <a:p>
@@ -3795,7 +3795,7 @@
                   <a:srgbClr val="1F3355"/>
                 </a:solidFill>
               </a:rPr>
-              <a:t>Conformal prediction's promised 90% hit-rate holds on training-like data (0.93) but falls to 0.61 once the traffic shifts -- the guarantee breaks exactly when deployment changes.</a:t>
+              <a:t>Conformal prediction's promised 90% hit-rate holds on training-like data (0.93) but falls to 0.61 once the traffic shifts, the guarantee breaks exactly when deployment changes.</a:t>
             </a:r>
           </a:p>
         </p:txBody>
@@ -3877,7 +3877,7 @@
                   <a:srgbClr val="1F3355"/>
                 </a:solidFill>
               </a:rPr>
-              <a:t>Pick a model whose confidence is informative (good at ranking its own errors — a tree-based model, not the linear one).</a:t>
+              <a:t>Pick a model whose confidence is informative (good at ranking its own errors, a tree-based model, not the linear one).</a:t>
             </a:r>
           </a:p>
           <a:p>
@@ -4004,7 +4004,7 @@
                   <a:srgbClr val="1F3355"/>
                 </a:solidFill>
               </a:rPr>
-              <a:t>Detectors are over-confident under NSL-KDD's shift and not fixable by post-hoc calibration, yet well-calibrated on two modern datasets -- calibration need is task-dependent.</a:t>
+              <a:t>Detectors are over-confident under NSL-KDD's shift and not fixable by post-hoc calibration, yet well-calibrated on two modern datasets: calibration need is task-dependent.</a:t>
             </a:r>
           </a:p>
           <a:p>
@@ -4019,7 +4019,7 @@
                   <a:srgbClr val="1F3355"/>
                 </a:solidFill>
               </a:rPr>
-              <a:t>The second failure recurs on all three datasets but is an operating-point one: a single global threshold misses minority look-like-normal families whose score is in fact discriminable -- so the much-cited 'detection collapse' is mostly a thresholding artifact.</a:t>
+              <a:t>The second failure recurs on all three datasets but is an operating-point one: a single global threshold misses minority look-like-normal families whose score is in fact discriminable, so the much-cited 'detection collapse' is mostly a thresholding artifact.</a:t>
             </a:r>
           </a:p>
           <a:p>
@@ -4034,7 +4034,7 @@
                   <a:srgbClr val="1F3355"/>
                 </a:solidFill>
               </a:rPr>
-              <a:t>Abstention lowers error where confidence ranks it; and simply tuning the operating point to the analyst budget recovers much of the look-like-normal traffic the argmax default hides -- a stacked novelty gate adds no further recall at matched cost.</a:t>
+              <a:t>Abstention lowers error where confidence ranks it; and simply tuning the operating point to the analyst budget recovers much of the look-like-normal traffic the argmax default hides; a stacked novelty gate adds no further recall at matched cost.</a:t>
             </a:r>
           </a:p>
           <a:p>
@@ -4439,7 +4439,7 @@
                   <a:srgbClr val="1F3355"/>
                 </a:solidFill>
               </a:rPr>
-              <a:t>A detector that outputs a single hard label (“attack” or “normal”) gives no signal of when to trust it — and stays silent on attacks it never saw in training.</a:t>
+              <a:t>A detector that outputs a single hard label (“attack” or “normal”) gives no signal of when to trust it, and stays silent on attacks it never saw in training.</a:t>
             </a:r>
           </a:p>
           <a:p>
@@ -4454,7 +4454,7 @@
                   <a:srgbClr val="1F3355"/>
                 </a:solidFill>
               </a:rPr>
-              <a:t>Why it matters: a missed novel attack reaches production before any analyst reviews it — exactly the case a single hard label handles worst.</a:t>
+              <a:t>Why it matters: a missed novel attack reaches production before any analyst reviews it, exactly the case a single hard label handles worst.</a:t>
             </a:r>
           </a:p>
           <a:p>
@@ -4469,7 +4469,7 @@
                   <a:srgbClr val="1F3355"/>
                 </a:solidFill>
               </a:rPr>
-              <a:t>Better: let it abstain — say “I’m not sure” on low-confidence inputs and pass them to an analyst or a backup check. This is called selective prediction.</a:t>
+              <a:t>Better: let it abstain, say “I’m not sure” on low-confidence inputs and pass them to an analyst or a backup check. This is called selective prediction.</a:t>
             </a:r>
           </a:p>
           <a:p>
@@ -4702,7 +4702,7 @@
                   <a:srgbClr val="1F3355"/>
                 </a:solidFill>
               </a:rPr>
-              <a:t>Over-confidence is task-dependent: detectors are badly miscalibrated under NSL-KDD's shift and NO post-hoc fix (Platt, isotonic, or temperature scaling) transfers -- yet on two modern flow datasets the same task is well calibrated.</a:t>
+              <a:t>Over-confidence is task-dependent: detectors are badly miscalibrated under NSL-KDD's shift and NO post-hoc fix (Platt, isotonic, or temperature scaling) transfers, yet on two modern flow datasets the same task is well calibrated.</a:t>
             </a:r>
           </a:p>
           <a:p>
@@ -4717,7 +4717,7 @@
                   <a:srgbClr val="1F3355"/>
                 </a:solidFill>
               </a:rPr>
-              <a:t>The benign-mimicry blind spot is an operating-point failure, not a representational one, and it recurs across all three datasets. R2L is nearly missed at the default threshold (recall 0.06) yet its score is discriminative (AUROC 0.87); a per-family threshold recovers much of it (0.49). Class balancing does not help -- so the cause is the threshold, not class frequency.</a:t>
+              <a:t>The benign-mimicry blind spot is an operating-point failure, not a representational one, and it recurs across all three datasets. R2L is nearly missed at the default threshold (recall 0.06) yet its score is discriminative (AUROC 0.87); a per-family threshold recovers much of it (0.49). Class balancing does not help, so the cause is the threshold, not class frequency.</a:t>
             </a:r>
           </a:p>
           <a:p>
@@ -4732,7 +4732,7 @@
                   <a:srgbClr val="1F3355"/>
                 </a:solidFill>
               </a:rPr>
-              <a:t>Selective prediction is useful but bounded: it helps only when confidence ranks errors; and on the benign-mimicking blind spot the lever is the OPERATING POINT -- a budget-tuned threshold recovers most of what argmax misses, while stacking abstention+novelty adds no gain at matched cost.</a:t>
+              <a:t>Selective prediction is useful but bounded: it helps only when confidence ranks errors; and on the benign-mimicking blind spot the lever is the OPERATING POINT: a budget-tuned threshold recovers most of what argmax misses, while stacking abstention+novelty adds no gain at matched cost.</a:t>
             </a:r>
           </a:p>
         </p:txBody>
@@ -4814,7 +4814,7 @@
                   <a:srgbClr val="1F3355"/>
                 </a:solidFill>
               </a:rPr>
-              <a:t>Calibration -- does a model's stated confidence match how often it is right? We measure the gap with expected calibration error (ECE) -- and the Brier score, a proper scoring rule, agrees -- then try three standard fixes (Platt, isotonic, and temperature scaling), each fit only on held-out training data so no test information leaks in.</a:t>
+              <a:t>Calibration: does a model's stated confidence match how often it is right? We measure the gap with expected calibration error (ECE), and the Brier score, a proper scoring rule, agrees, then try three standard fixes (Platt, isotonic, and temperature scaling), each fit only on held-out training data so no test information leaks in.</a:t>
             </a:r>
           </a:p>
           <a:p>
@@ -4829,7 +4829,7 @@
                   <a:srgbClr val="1F3355"/>
                 </a:solidFill>
               </a:rPr>
-              <a:t>Selective prediction -- confidence = the model's top class probability. The risk-coverage curve plots error against the fraction answered; the area under it (AURC) summarizes it (lower is better).</a:t>
+              <a:t>Selective prediction: confidence = the model's top class probability. The risk-coverage curve plots error against the fraction answered; the area under it (AURC) summarizes it (lower is better).</a:t>
             </a:r>
           </a:p>
           <a:p>
@@ -4859,7 +4859,7 @@
                   <a:srgbClr val="1F3355"/>
                 </a:solidFill>
               </a:rPr>
-              <a:t>Honesty checks: a bootstrap over the (fixed) test set -- the seed-only intervals understate uncertainty about 5x -- and conformal prediction, which promises a hit-rate as long as new data looks like the old.</a:t>
+              <a:t>Honesty checks: a bootstrap over the (fixed) test set (the seed-only intervals understate uncertainty about 5x) and conformal prediction, which promises a hit-rate as long as new data looks like the old.</a:t>
             </a:r>
           </a:p>
         </p:txBody>
@@ -4941,7 +4941,7 @@
                   <a:srgbClr val="1F3355"/>
                 </a:solidFill>
               </a:rPr>
-              <a:t>Detectors: logistic regression (a simple linear model), a random forest, and gradient boosting (both built from many decision trees) — deliberately ordinary; the subject is their confidence, not the architecture.</a:t>
+              <a:t>Detectors: logistic regression (a simple linear model), a random forest, and gradient boosting (both built from many decision trees), deliberately ordinary; the subject is their confidence, not the architecture.</a:t>
             </a:r>
           </a:p>
           <a:p>
@@ -4986,7 +4986,7 @@
                   <a:srgbClr val="1F3355"/>
                 </a:solidFill>
               </a:rPr>
-              <a:t>Novelty detectors — trained only on normal traffic to flag anything unusual: Isolation Forest and a one-class SVM.</a:t>
+              <a:t>Novelty detectors, trained only on normal traffic to flag anything unusual: Isolation Forest and a one-class SVM.</a:t>
             </a:r>
           </a:p>
         </p:txBody>
@@ -5068,7 +5068,7 @@
                   <a:srgbClr val="1F3355"/>
                 </a:solidFill>
               </a:rPr>
-              <a:t>NSL-KDD — a public benchmark of network connections (~126k train / 22.5k test, 41 measured features each); attacks fall into four families (DoS, Probe, R2L, U2R). Its test set deliberately includes attack types missing from training — a built-in unknown-attack test.</a:t>
+              <a:t>NSL-KDD: a public benchmark of network connections (~126k train / 22.5k test, 41 measured features each); attacks fall into four families (DoS, Probe, R2L, U2R). Its test set deliberately includes attack types missing from training, a built-in unknown-attack test.</a:t>
             </a:r>
           </a:p>
           <a:p>
@@ -5083,7 +5083,7 @@
                   <a:srgbClr val="1F3355"/>
                 </a:solidFill>
               </a:rPr>
-              <a:t>CIC-IDS-2017 — a newer dataset of network “flows” (per-connection summaries, 78 features), over three days (DDoS, PortScan, Web attacks).</a:t>
+              <a:t>CIC-IDS-2017: a newer dataset of network “flows” (per-connection summaries, 78 features), over three days (DDoS, PortScan, Web attacks).</a:t>
             </a:r>
           </a:p>
           <a:p>
@@ -5098,7 +5098,7 @@
                   <a:srgbClr val="1F3355"/>
                 </a:solidFill>
               </a:rPr>
-              <a:t>CSE-CIC-IDS-2018 — a different network and year, used to test transfer on the 27 features the two datasets share by name.</a:t>
+              <a:t>CSE-CIC-IDS-2018: a different network and year, used to test transfer on the 27 features the two datasets share by name.</a:t>
             </a:r>
           </a:p>
           <a:p>
@@ -5219,7 +5219,7 @@
                   <a:srgbClr val="1F3355"/>
                 </a:solidFill>
               </a:rPr>
-              <a:t>The most attackable reading -- 'R2L is just an unbalanced classifier at the default cut' -- is wrong about the cause. The attack score separates R2L from normal well above chance (AUROC 0.87 seen, 0.80 unknown).</a:t>
+              <a:t>The most attackable reading ('R2L is just an unbalanced classifier at the default cut') is wrong about the cause. The attack score separates R2L from normal well above chance (AUROC 0.87 seen, 0.80 unknown).</a:t>
             </a:r>
           </a:p>
           <a:p>
@@ -5249,7 +5249,7 @@
                   <a:srgbClr val="1F3355"/>
                 </a:solidFill>
               </a:rPr>
-              <a:t>Threshold-free, holding a family out of training costs little AUROC (DoS -0.06, R2L -0.07) -- so the dramatic 'detection collapse' on unknown families is largely a thresholding artifact.</a:t>
+              <a:t>Threshold-free, holding a family out of training costs little AUROC (DoS -0.06, R2L -0.07), so the dramatic 'detection collapse' on unknown families is largely a thresholding artifact.</a:t>
             </a:r>
           </a:p>
         </p:txBody>
@@ -5404,7 +5404,7 @@
                   <a:srgbClr val="1F3355"/>
                 </a:solidFill>
               </a:rPr>
-              <a:t>No post-hoc fix removes it: Platt, isotonic, and temperature scaling all stay high (every marker clusters at the top) -- each is fit on the source distribution.</a:t>
+              <a:t>No post-hoc fix removes it: Platt, isotonic, and temperature scaling all stay high (every marker clusters at the top), each is fit on the source distribution.</a:t>
             </a:r>
           </a:p>
           <a:p>
@@ -5419,7 +5419,7 @@
                   <a:srgbClr val="1F3355"/>
                 </a:solidFill>
               </a:rPr>
-              <a:t>Source-calibrated probabilities do not certify the deployed distribution -- which is why we turn to abstention (it needs only a usable confidence ranking).</a:t>
+              <a:t>Source-calibrated probabilities do not certify the deployed distribution, which is why we turn to abstention (it needs only a usable confidence ranking).</a:t>
             </a:r>
           </a:p>
         </p:txBody>
@@ -5497,7 +5497,7 @@
                   <a:srgbClr val="1F3355"/>
                 </a:solidFill>
               </a:rPr>
-              <a:t>Finding 3: abstaining helps — if confidence ranks errors</a:t>
+              <a:t>Finding 3: abstaining helps, if confidence ranks errors</a:t>
             </a:r>
           </a:p>
         </p:txBody>
@@ -5574,7 +5574,7 @@
                   <a:srgbClr val="1F3355"/>
                 </a:solidFill>
               </a:rPr>
-              <a:t>The linear model’s confidence barely ranks its mistakes (area ~ 0.23) — so abstaining buys little.</a:t>
+              <a:t>The linear model’s confidence barely ranks its mistakes (area ~ 0.23), so abstaining buys little.</a:t>
             </a:r>
           </a:p>
           <a:p>

--- a/papers/paper2-ids-selective/presentation.pptx
+++ b/papers/paper2-ids-selective/presentation.pptx
@@ -5068,7 +5068,7 @@
                   <a:srgbClr val="1F3355"/>
                 </a:solidFill>
               </a:rPr>
-              <a:t>NSL-KDD: a public benchmark of network connections (~126k train / 22.5k test, 41 measured features each); attacks fall into four families (DoS, Probe, R2L, U2R). Its test set deliberately includes attack types missing from training, a built-in unknown-attack test.</a:t>
+              <a:t>NSL-KDD: a public benchmark of network connections (~126k train / 22.5k test, 41 measured features each); attacks fall into four families: DoS (denial of service), Probe (network scanning), R2L (remote-to-local intrusion), and U2R (user-to-root escalation). Its test set deliberately includes attack types missing from training, a built-in unknown-attack test.</a:t>
             </a:r>
           </a:p>
           <a:p>

--- a/papers/paper2-ids-selective/presentation.pptx
+++ b/papers/paper2-ids-selective/presentation.pptx
@@ -2820,7 +2820,7 @@
             <a:r>
               <a:rPr sz="3000" b="1">
                 <a:solidFill>
-                  <a:srgbClr val="1F3355"/>
+                  <a:srgbClr val="1F4E6B"/>
                 </a:solidFill>
               </a:rPr>
               <a:t>Knowing When to Abstain: Calibration and Selective Prediction for ML Network Intrusion Detection</a:t>
@@ -2858,7 +2858,7 @@
             <a:r>
               <a:rPr sz="1800">
                 <a:solidFill>
-                  <a:srgbClr val="1F3355"/>
+                  <a:srgbClr val="1F4E6B"/>
                 </a:solidFill>
               </a:rPr>
               <a:t>The much-cited 'detection collapse' on unknown attacks is mostly a thresholding artifact</a:t>
@@ -2873,7 +2873,7 @@
             <a:r>
               <a:rPr sz="1800">
                 <a:solidFill>
-                  <a:srgbClr val="1F3355"/>
+                  <a:srgbClr val="1F4E6B"/>
                 </a:solidFill>
               </a:rPr>
               <a:t>UBMK’25 · International Conference on Computer Science and Engineering</a:t>
@@ -2888,7 +2888,7 @@
             <a:r>
               <a:rPr sz="1800">
                 <a:solidFill>
-                  <a:srgbClr val="1F3355"/>
+                  <a:srgbClr val="1F4E6B"/>
                 </a:solidFill>
               </a:rPr>
               <a:t>Track: Computer and Data Security</a:t>
@@ -2903,7 +2903,7 @@
             <a:r>
               <a:rPr sz="1800">
                 <a:solidFill>
-                  <a:srgbClr val="1F3355"/>
+                  <a:srgbClr val="1F4E6B"/>
                 </a:solidFill>
               </a:rPr>
               <a:t>Author(s) and affiliation withheld for review</a:t>
@@ -2947,7 +2947,7 @@
             <a:r>
               <a:rPr sz="3000" b="1">
                 <a:solidFill>
-                  <a:srgbClr val="1F3355"/>
+                  <a:srgbClr val="1F4E6B"/>
                 </a:solidFill>
               </a:rPr>
               <a:t>Finding 4: why R2L is the blind spot</a:t>
@@ -3009,7 +3009,7 @@
             <a:r>
               <a:rPr sz="1600">
                 <a:solidFill>
-                  <a:srgbClr val="1F3355"/>
+                  <a:srgbClr val="1F4E6B"/>
                 </a:solidFill>
               </a:rPr>
               <a:t>R2L’s records pile up right on top of the normal ones, inside the “looks-normal” region, for both independent novelty detectors.</a:t>
@@ -3024,7 +3024,7 @@
             <a:r>
               <a:rPr sz="1600">
                 <a:solidFill>
-                  <a:srgbClr val="1F3355"/>
+                  <a:srgbClr val="1F4E6B"/>
                 </a:solidFill>
               </a:rPr>
               <a:t>It mimics ordinary traffic, so neither abstaining nor a normal-only novelty check can cleanly flag it; DoS, Probe, and U2R clearly stand out.</a:t>
@@ -3058,7 +3058,7 @@
             <a:r>
               <a:rPr sz="1200" i="1">
                 <a:solidFill>
-                  <a:srgbClr val="555555"/>
+                  <a:srgbClr val="6B7079"/>
                 </a:solidFill>
               </a:rPr>
               <a:t>(a) how unusual each record looks to two “normal-only” detectors; (b) the same, per family.</a:t>
@@ -3102,7 +3102,7 @@
             <a:r>
               <a:rPr sz="3000" b="1">
                 <a:solidFill>
-                  <a:srgbClr val="1F3355"/>
+                  <a:srgbClr val="1F4E6B"/>
                 </a:solidFill>
               </a:rPr>
               <a:t>Finding 5: a normal-only novelty stage partly closes the gap</a:t>
@@ -3164,7 +3164,7 @@
             <a:r>
               <a:rPr sz="1600">
                 <a:solidFill>
-                  <a:srgbClr val="1F3355"/>
+                  <a:srgbClr val="1F4E6B"/>
                 </a:solidFill>
               </a:rPr>
               <a:t>Trained only on normal traffic, Isolation Forest / one-class SVM separate DoS, Probe, U2R well (score ~ 0.90–0.99).</a:t>
@@ -3179,7 +3179,7 @@
             <a:r>
               <a:rPr sz="1600">
                 <a:solidFill>
-                  <a:srgbClr val="1F3355"/>
+                  <a:srgbClr val="1F4E6B"/>
                 </a:solidFill>
               </a:rPr>
               <a:t>R2L stays hardest (~ 0.73–0.82), it overlaps normal traffic the most.</a:t>
@@ -3194,7 +3194,7 @@
             <a:r>
               <a:rPr sz="1600">
                 <a:solidFill>
-                  <a:srgbClr val="1F3355"/>
+                  <a:srgbClr val="1F4E6B"/>
                 </a:solidFill>
               </a:rPr>
               <a:t>Abstaining and novelty detection catch different failures, so use both.</a:t>
@@ -3228,7 +3228,7 @@
             <a:r>
               <a:rPr sz="1200" i="1">
                 <a:solidFill>
-                  <a:srgbClr val="555555"/>
+                  <a:srgbClr val="6B7079"/>
                 </a:solidFill>
               </a:rPr>
               <a:t>How well each attack family separates from normal traffic (1 = perfect, 0.5 = chance).</a:t>
@@ -3272,7 +3272,7 @@
             <a:r>
               <a:rPr sz="3000" b="1">
                 <a:solidFill>
-                  <a:srgbClr val="1F3355"/>
+                  <a:srgbClr val="1F4E6B"/>
                 </a:solidFill>
               </a:rPr>
               <a:t>The recipe, re-baselined honestly</a:t>
@@ -3334,7 +3334,7 @@
             <a:r>
               <a:rPr sz="1600">
                 <a:solidFill>
-                  <a:srgbClr val="1F3355"/>
+                  <a:srgbClr val="1F4E6B"/>
                 </a:solidFill>
               </a:rPr>
               <a:t>The earlier 0.003 -&gt; 0.40 gain was measured against the argmax default, a bad threshold for a minority family. We re-baseline against a single threshold TUNED to the same review budget.</a:t>
@@ -3349,7 +3349,7 @@
             <a:r>
               <a:rPr sz="1600">
                 <a:solidFill>
-                  <a:srgbClr val="1F3355"/>
+                  <a:srgbClr val="1F4E6B"/>
                 </a:solidFill>
               </a:rPr>
               <a:t>At matched cost: argmax 0.00; a tuned threshold 0.51; the full stack (argmax+abstention+novelty) only 0.40, BELOW the tuned threshold (paired gap -0.11).</a:t>
@@ -3364,7 +3364,7 @@
             <a:r>
               <a:rPr sz="1600">
                 <a:solidFill>
-                  <a:srgbClr val="1F3355"/>
+                  <a:srgbClr val="1F4E6B"/>
                 </a:solidFill>
               </a:rPr>
               <a:t>So the lever is the operating point, not the gates: stacking adds no net recall once the threshold is set to the budget. (Even so, about half of unknown R2L is still missed.)</a:t>
@@ -3398,7 +3398,7 @@
             <a:r>
               <a:rPr sz="1200" i="1">
                 <a:solidFill>
-                  <a:srgbClr val="555555"/>
+                  <a:srgbClr val="6B7079"/>
                 </a:solidFill>
               </a:rPr>
               <a:t>Unknown (held-out) R2L at a matched review budget: argmax vs tuned threshold vs full stack.</a:t>
@@ -3442,7 +3442,7 @@
             <a:r>
               <a:rPr sz="3000" b="1">
                 <a:solidFill>
-                  <a:srgbClr val="1F3355"/>
+                  <a:srgbClr val="1F4E6B"/>
                 </a:solidFill>
               </a:rPr>
               <a:t>Validating the fix: across budgets and a second corpus</a:t>
@@ -3504,7 +3504,7 @@
             <a:r>
               <a:rPr sz="1600">
                 <a:solidFill>
-                  <a:srgbClr val="1F3355"/>
+                  <a:srgbClr val="1F4E6B"/>
                 </a:solidFill>
               </a:rPr>
               <a:t>Is the re-baseline a one-point fluke? We sweep three review budgets (5/10/20%) and add a second corpus, CIC-2018 Infiltration, the look-like-normal family there.</a:t>
@@ -3519,7 +3519,7 @@
             <a:r>
               <a:rPr sz="1600">
                 <a:solidFill>
-                  <a:srgbClr val="1F3355"/>
+                  <a:srgbClr val="1F4E6B"/>
                 </a:solidFill>
               </a:rPr>
               <a:t>The abstention+novelty stack beats a budget-tuned threshold in just 1 of 6 budget x corpus cells (CIC at 5%, +0.015); it loses the other five, decisively on unknown R2L (e.g. -0.39 at 20%).</a:t>
@@ -3534,7 +3534,7 @@
             <a:r>
               <a:rPr sz="1600">
                 <a:solidFill>
-                  <a:srgbClr val="1F3355"/>
+                  <a:srgbClr val="1F4E6B"/>
                 </a:solidFill>
               </a:rPr>
               <a:t>So at equal analyst cost the stack adds no recall a tuned threshold doesn't already give, and we tune the stack FAVOURABLY, not as a strawman; a harder-tuned threshold only widens the gap. (Headline gap: seed-paired -0.11; bootstrap -0.06, 95% CI [-0.10, 0.00].)</a:t>
@@ -3568,7 +3568,7 @@
             <a:r>
               <a:rPr sz="1200" i="1">
                 <a:solidFill>
-                  <a:srgbClr val="555555"/>
+                  <a:srgbClr val="6B7079"/>
                 </a:solidFill>
               </a:rPr>
               <a:t>Tuned threshold vs. the full stack at matched analyst budget, on unknown R2L and cross-corpus Infiltration.</a:t>
@@ -3612,7 +3612,7 @@
             <a:r>
               <a:rPr sz="3000" b="1">
                 <a:solidFill>
-                  <a:srgbClr val="1F3355"/>
+                  <a:srgbClr val="1F4E6B"/>
                 </a:solidFill>
               </a:rPr>
               <a:t>Finding 6: calibration need is task-dependent; the blind spot recurs (3 datasets)</a:t>
@@ -3650,7 +3650,7 @@
             <a:r>
               <a:rPr sz="1800">
                 <a:solidFill>
-                  <a:srgbClr val="1F3355"/>
+                  <a:srgbClr val="1F4E6B"/>
                 </a:solidFill>
               </a:rPr>
               <a:t>CIC-IDS-2017: the within-day task is easy and already well-calibrated (accuracy ~1.0, calibration error ~0.0001), over-confidence is a property of the task, not a built-in flaw.</a:t>
@@ -3665,7 +3665,7 @@
             <a:r>
               <a:rPr sz="1800">
                 <a:solidFill>
-                  <a:srgbClr val="1F3355"/>
+                  <a:srgbClr val="1F4E6B"/>
                 </a:solidFill>
               </a:rPr>
               <a:t>Drift (train one day, test another): Web detection 0.98 -&gt; 0.79, and abstaining catches 0.95 of unknown Web, far more than R2L, because Web does not look like normal traffic.</a:t>
@@ -3680,7 +3680,7 @@
             <a:r>
               <a:rPr sz="1800">
                 <a:solidFill>
-                  <a:srgbClr val="1F3355"/>
+                  <a:srgbClr val="1F4E6B"/>
                 </a:solidFill>
               </a:rPr>
               <a:t>CIC-IDS-2018 (third dataset): Infiltration is the canonical look-like-normal family and repeats the R2L signature exactly: well-calibrated (error 0.006), yet missed at the default cut (recall 0.25) while its score is discriminative (AUROC 0.71) and a per-family threshold recovers 0.39.</a:t>
@@ -3724,7 +3724,7 @@
             <a:r>
               <a:rPr sz="3000" b="1">
                 <a:solidFill>
-                  <a:srgbClr val="1F3355"/>
+                  <a:srgbClr val="1F4E6B"/>
                 </a:solidFill>
               </a:rPr>
               <a:t>Which confidence signal? Can we promise a hit-rate?</a:t>
@@ -3762,7 +3762,7 @@
             <a:r>
               <a:rPr sz="1800">
                 <a:solidFill>
-                  <a:srgbClr val="1F3355"/>
+                  <a:srgbClr val="1F4E6B"/>
                 </a:solidFill>
               </a:rPr>
               <a:t>Comparing the signals fairly (same data, paired): the cheap top-probability is statistically tied with the fancier ones; the distance score is slightly better at ranking errors but worse at spotting unknown attacks.</a:t>
@@ -3777,7 +3777,7 @@
             <a:r>
               <a:rPr sz="1800">
                 <a:solidFill>
-                  <a:srgbClr val="1F3355"/>
+                  <a:srgbClr val="1F4E6B"/>
                 </a:solidFill>
               </a:rPr>
               <a:t>So on this kind of tabular traffic data, plain confidence is a strong default: the value is in the abstain framework, not the exact signal. (Classical signals only; energy/ODIN-style scores need a neural net we deliberately avoid.)</a:t>
@@ -3792,7 +3792,7 @@
             <a:r>
               <a:rPr sz="1800">
                 <a:solidFill>
-                  <a:srgbClr val="1F3355"/>
+                  <a:srgbClr val="1F4E6B"/>
                 </a:solidFill>
               </a:rPr>
               <a:t>Conformal prediction's promised 90% hit-rate holds on training-like data (0.93) but falls to 0.61 once the traffic shifts, the guarantee breaks exactly when deployment changes.</a:t>
@@ -3836,7 +3836,7 @@
             <a:r>
               <a:rPr sz="3000" b="1">
                 <a:solidFill>
-                  <a:srgbClr val="1F3355"/>
+                  <a:srgbClr val="1F4E6B"/>
                 </a:solidFill>
               </a:rPr>
               <a:t>Discussion: a practical recipe</a:t>
@@ -3874,7 +3874,7 @@
             <a:r>
               <a:rPr sz="1800">
                 <a:solidFill>
-                  <a:srgbClr val="1F3355"/>
+                  <a:srgbClr val="1F4E6B"/>
                 </a:solidFill>
               </a:rPr>
               <a:t>Pick a model whose confidence is informative (good at ranking its own errors, a tree-based model, not the linear one).</a:t>
@@ -3889,7 +3889,7 @@
             <a:r>
               <a:rPr sz="1800">
                 <a:solidFill>
-                  <a:srgbClr val="1F3355"/>
+                  <a:srgbClr val="1F4E6B"/>
                 </a:solidFill>
               </a:rPr>
               <a:t>Choose how much to answer from the risk–coverage curve; send the refused cases to a human or a backup check.</a:t>
@@ -3904,7 +3904,7 @@
             <a:r>
               <a:rPr sz="1800">
                 <a:solidFill>
-                  <a:srgbClr val="1F3355"/>
+                  <a:srgbClr val="1F4E6B"/>
                 </a:solidFill>
               </a:rPr>
               <a:t>Watch the abstain rate as a cheap, label-free warning that the traffic is drifting.</a:t>
@@ -3919,7 +3919,7 @@
             <a:r>
               <a:rPr sz="1800">
                 <a:solidFill>
-                  <a:srgbClr val="1F3355"/>
+                  <a:srgbClr val="1F4E6B"/>
                 </a:solidFill>
               </a:rPr>
               <a:t>Add a normal-only novelty check for the look-like-normal attacks abstaining cannot catch.</a:t>
@@ -3963,7 +3963,7 @@
             <a:r>
               <a:rPr sz="3000" b="1">
                 <a:solidFill>
-                  <a:srgbClr val="1F3355"/>
+                  <a:srgbClr val="1F4E6B"/>
                 </a:solidFill>
               </a:rPr>
               <a:t>Conclusions and future work</a:t>
@@ -4001,7 +4001,7 @@
             <a:r>
               <a:rPr sz="1800">
                 <a:solidFill>
-                  <a:srgbClr val="1F3355"/>
+                  <a:srgbClr val="1F4E6B"/>
                 </a:solidFill>
               </a:rPr>
               <a:t>Detectors are over-confident under NSL-KDD's shift and not fixable by post-hoc calibration, yet well-calibrated on two modern datasets: calibration need is task-dependent.</a:t>
@@ -4016,7 +4016,7 @@
             <a:r>
               <a:rPr sz="1800">
                 <a:solidFill>
-                  <a:srgbClr val="1F3355"/>
+                  <a:srgbClr val="1F4E6B"/>
                 </a:solidFill>
               </a:rPr>
               <a:t>The second failure recurs on all three datasets but is an operating-point one: a single global threshold misses minority look-like-normal families whose score is in fact discriminable, so the much-cited 'detection collapse' is mostly a thresholding artifact.</a:t>
@@ -4031,7 +4031,7 @@
             <a:r>
               <a:rPr sz="1800">
                 <a:solidFill>
-                  <a:srgbClr val="1F3355"/>
+                  <a:srgbClr val="1F4E6B"/>
                 </a:solidFill>
               </a:rPr>
               <a:t>Abstention lowers error where confidence ranks it; and simply tuning the operating point to the analyst budget recovers much of the look-like-normal traffic the argmax default hides; a stacked novelty gate adds no further recall at matched cost.</a:t>
@@ -4046,7 +4046,7 @@
             <a:r>
               <a:rPr sz="1800">
                 <a:solidFill>
-                  <a:srgbClr val="1F3355"/>
+                  <a:srgbClr val="1F4E6B"/>
                 </a:solidFill>
               </a:rPr>
               <a:t>Future: a full time-ordered evaluation, the label-corrected CIC-2017, and a shared NetFlow feature format for transfer across networks.</a:t>
@@ -4090,7 +4090,7 @@
             <a:r>
               <a:rPr sz="3000" b="1">
                 <a:solidFill>
-                  <a:srgbClr val="1F3355"/>
+                  <a:srgbClr val="1F4E6B"/>
                 </a:solidFill>
               </a:rPr>
               <a:t>Selected references</a:t>
@@ -4128,7 +4128,7 @@
             <a:r>
               <a:rPr sz="1800">
                 <a:solidFill>
-                  <a:srgbClr val="1F3355"/>
+                  <a:srgbClr val="1F4E6B"/>
                 </a:solidFill>
               </a:rPr>
               <a:t>M. Tavallaee et al., “A detailed analysis of the KDD Cup 99 / NSL-KDD data set,” 2009.</a:t>
@@ -4143,7 +4143,7 @@
             <a:r>
               <a:rPr sz="1800">
                 <a:solidFill>
-                  <a:srgbClr val="1F3355"/>
+                  <a:srgbClr val="1F4E6B"/>
                 </a:solidFill>
               </a:rPr>
               <a:t>C. Guo et al., “On calibration of modern neural networks,” 2017.</a:t>
@@ -4158,7 +4158,7 @@
             <a:r>
               <a:rPr sz="1800">
                 <a:solidFill>
-                  <a:srgbClr val="1F3355"/>
+                  <a:srgbClr val="1F4E6B"/>
                 </a:solidFill>
               </a:rPr>
               <a:t>Y. Geifman and R. El-Yaniv, selective prediction / risk–coverage, 2017; El-Yaniv &amp; Wiener, 2010.</a:t>
@@ -4173,7 +4173,7 @@
             <a:r>
               <a:rPr sz="1800">
                 <a:solidFill>
-                  <a:srgbClr val="1F3355"/>
+                  <a:srgbClr val="1F4E6B"/>
                 </a:solidFill>
               </a:rPr>
               <a:t>D. Hendrycks and K. Gimpel, max-softmax baseline for misclassification/OOD, 2017.</a:t>
@@ -4188,7 +4188,7 @@
             <a:r>
               <a:rPr sz="1800">
                 <a:solidFill>
-                  <a:srgbClr val="1F3355"/>
+                  <a:srgbClr val="1F4E6B"/>
                 </a:solidFill>
               </a:rPr>
               <a:t>D. Arp et al., “Dos and Don'ts of machine learning in computer security,” 2022.</a:t>
@@ -4203,7 +4203,7 @@
             <a:r>
               <a:rPr sz="1800">
                 <a:solidFill>
-                  <a:srgbClr val="1F3355"/>
+                  <a:srgbClr val="1F4E6B"/>
                 </a:solidFill>
               </a:rPr>
               <a:t>A. Angelopoulos and S. Bates, conformal prediction, 2023.</a:t>
@@ -4247,7 +4247,7 @@
             <a:r>
               <a:rPr sz="3000" b="1">
                 <a:solidFill>
-                  <a:srgbClr val="1F3355"/>
+                  <a:srgbClr val="1F4E6B"/>
                 </a:solidFill>
               </a:rPr>
               <a:t>Appendix: uncertainty signals on NSL-KDD</a:t>
@@ -4285,7 +4285,7 @@
             <a:r>
               <a:rPr sz="1800">
                 <a:solidFill>
-                  <a:srgbClr val="1F3355"/>
+                  <a:srgbClr val="1F4E6B"/>
                 </a:solidFill>
               </a:rPr>
               <a:t>AURC (lower is better): max-softmax 0.060, Mahalanobis 0.058, k-NN 0.068, RF disagreement 0.060.</a:t>
@@ -4300,7 +4300,7 @@
             <a:r>
               <a:rPr sz="1800">
                 <a:solidFill>
-                  <a:srgbClr val="1F3355"/>
+                  <a:srgbClr val="1F4E6B"/>
                 </a:solidFill>
               </a:rPr>
               <a:t>Mahalanobis is marginally better at error-ranking but significantly worse at unknown-attack separation than max-softmax.</a:t>
@@ -4315,7 +4315,7 @@
             <a:r>
               <a:rPr sz="1800">
                 <a:solidFill>
-                  <a:srgbClr val="1F3355"/>
+                  <a:srgbClr val="1F4E6B"/>
                 </a:solidFill>
               </a:rPr>
               <a:t>Split-conformal coverage: 0.93 in-distribution -&gt; 0.61 under the train–test shift (target 0.90).</a:t>
@@ -4330,7 +4330,7 @@
             <a:r>
               <a:rPr sz="1800">
                 <a:solidFill>
-                  <a:srgbClr val="1F3355"/>
+                  <a:srgbClr val="1F4E6B"/>
                 </a:solidFill>
               </a:rPr>
               <a:t>All metrics: means over K seeds with 95% confidence intervals.</a:t>
@@ -4374,7 +4374,7 @@
             <a:r>
               <a:rPr sz="3000" b="1">
                 <a:solidFill>
-                  <a:srgbClr val="1F3355"/>
+                  <a:srgbClr val="1F4E6B"/>
                 </a:solidFill>
               </a:rPr>
               <a:t>Introduction: detectors that fail silently</a:t>
@@ -4436,7 +4436,7 @@
             <a:r>
               <a:rPr sz="1600">
                 <a:solidFill>
-                  <a:srgbClr val="1F3355"/>
+                  <a:srgbClr val="1F4E6B"/>
                 </a:solidFill>
               </a:rPr>
               <a:t>A detector that outputs a single hard label (“attack” or “normal”) gives no signal of when to trust it, and stays silent on attacks it never saw in training.</a:t>
@@ -4451,7 +4451,7 @@
             <a:r>
               <a:rPr sz="1600">
                 <a:solidFill>
-                  <a:srgbClr val="1F3355"/>
+                  <a:srgbClr val="1F4E6B"/>
                 </a:solidFill>
               </a:rPr>
               <a:t>Why it matters: a missed novel attack reaches production before any analyst reviews it, exactly the case a single hard label handles worst.</a:t>
@@ -4466,7 +4466,7 @@
             <a:r>
               <a:rPr sz="1600">
                 <a:solidFill>
-                  <a:srgbClr val="1F3355"/>
+                  <a:srgbClr val="1F4E6B"/>
                 </a:solidFill>
               </a:rPr>
               <a:t>Better: let it abstain, say “I’m not sure” on low-confidence inputs and pass them to an analyst or a backup check. This is called selective prediction.</a:t>
@@ -4481,7 +4481,7 @@
             <a:r>
               <a:rPr sz="1600">
                 <a:solidFill>
-                  <a:srgbClr val="1F3355"/>
+                  <a:srgbClr val="1F4E6B"/>
                 </a:solidFill>
               </a:rPr>
               <a:t>Question: do ordinary, off-the-shelf detectors know when they are wrong?</a:t>
@@ -4496,7 +4496,7 @@
             <a:r>
               <a:rPr sz="1400">
                 <a:solidFill>
-                  <a:srgbClr val="555555"/>
+                  <a:srgbClr val="6B7079"/>
                 </a:solidFill>
               </a:rPr>
               <a:t>We propose no new detector; we test the ones people already use.</a:t>
@@ -4530,7 +4530,7 @@
             <a:r>
               <a:rPr sz="1200" i="1">
                 <a:solidFill>
-                  <a:srgbClr val="555555"/>
+                  <a:srgbClr val="6B7079"/>
                 </a:solidFill>
               </a:rPr>
               <a:t>The selective-prediction (“reject-option”) wrapper we evaluate.</a:t>
@@ -4579,7 +4579,7 @@
             <a:r>
               <a:rPr sz="4000" b="1">
                 <a:solidFill>
-                  <a:srgbClr val="1F3355"/>
+                  <a:srgbClr val="1F4E6B"/>
                 </a:solidFill>
               </a:rPr>
               <a:t>Thank you</a:t>
@@ -4617,7 +4617,7 @@
             <a:r>
               <a:rPr sz="1800">
                 <a:solidFill>
-                  <a:srgbClr val="1F3355"/>
+                  <a:srgbClr val="1F4E6B"/>
                 </a:solidFill>
               </a:rPr>
               <a:t>Questions?  ·  LOFO protocol and analysis code released for verification.</a:t>
@@ -4661,7 +4661,7 @@
             <a:r>
               <a:rPr sz="3000" b="1">
                 <a:solidFill>
-                  <a:srgbClr val="1F3355"/>
+                  <a:srgbClr val="1F4E6B"/>
                 </a:solidFill>
               </a:rPr>
               <a:t>Contributions: a dissociation between two failure modes</a:t>
@@ -4699,7 +4699,7 @@
             <a:r>
               <a:rPr sz="1800">
                 <a:solidFill>
-                  <a:srgbClr val="1F3355"/>
+                  <a:srgbClr val="1F4E6B"/>
                 </a:solidFill>
               </a:rPr>
               <a:t>Over-confidence is task-dependent: detectors are badly miscalibrated under NSL-KDD's shift and NO post-hoc fix (Platt, isotonic, or temperature scaling) transfers, yet on two modern flow datasets the same task is well calibrated.</a:t>
@@ -4714,7 +4714,7 @@
             <a:r>
               <a:rPr sz="1800">
                 <a:solidFill>
-                  <a:srgbClr val="1F3355"/>
+                  <a:srgbClr val="1F4E6B"/>
                 </a:solidFill>
               </a:rPr>
               <a:t>The benign-mimicry blind spot is an operating-point failure, not a representational one, and it recurs across all three datasets. R2L is nearly missed at the default threshold (recall 0.06) yet its score is discriminative (AUROC 0.87); a per-family threshold recovers much of it (0.49). Class balancing does not help, so the cause is the threshold, not class frequency.</a:t>
@@ -4729,7 +4729,7 @@
             <a:r>
               <a:rPr sz="1800">
                 <a:solidFill>
-                  <a:srgbClr val="1F3355"/>
+                  <a:srgbClr val="1F4E6B"/>
                 </a:solidFill>
               </a:rPr>
               <a:t>Selective prediction is useful but bounded: it helps only when confidence ranks errors; and on the benign-mimicking blind spot the lever is the OPERATING POINT: a budget-tuned threshold recovers most of what argmax misses, while stacking abstention+novelty adds no gain at matched cost.</a:t>
@@ -4773,7 +4773,7 @@
             <a:r>
               <a:rPr sz="3000" b="1">
                 <a:solidFill>
-                  <a:srgbClr val="1F3355"/>
+                  <a:srgbClr val="1F4E6B"/>
                 </a:solidFill>
               </a:rPr>
               <a:t>Method</a:t>
@@ -4811,7 +4811,7 @@
             <a:r>
               <a:rPr sz="1800">
                 <a:solidFill>
-                  <a:srgbClr val="1F3355"/>
+                  <a:srgbClr val="1F4E6B"/>
                 </a:solidFill>
               </a:rPr>
               <a:t>Calibration: does a model's stated confidence match how often it is right? We measure the gap with expected calibration error (ECE), and the Brier score, a proper scoring rule, agrees, then try three standard fixes (Platt, isotonic, and temperature scaling), each fit only on held-out training data so no test information leaks in.</a:t>
@@ -4826,7 +4826,7 @@
             <a:r>
               <a:rPr sz="1800">
                 <a:solidFill>
-                  <a:srgbClr val="1F3355"/>
+                  <a:srgbClr val="1F4E6B"/>
                 </a:solidFill>
               </a:rPr>
               <a:t>Selective prediction: confidence = the model's top class probability. The risk-coverage curve plots error against the fraction answered; the area under it (AURC) summarizes it (lower is better).</a:t>
@@ -4841,7 +4841,7 @@
             <a:r>
               <a:rPr sz="1800">
                 <a:solidFill>
-                  <a:srgbClr val="1F3355"/>
+                  <a:srgbClr val="1F4E6B"/>
                 </a:solidFill>
               </a:rPr>
               <a:t>Open-set (LOFO): drop one attack family from training, retrain, and measure detection on the unseen family. To separate a threshold artifact from true indistinguishability we also report threshold-free per-family detection AUROC.</a:t>
@@ -4856,7 +4856,7 @@
             <a:r>
               <a:rPr sz="1800">
                 <a:solidFill>
-                  <a:srgbClr val="1F3355"/>
+                  <a:srgbClr val="1F4E6B"/>
                 </a:solidFill>
               </a:rPr>
               <a:t>Honesty checks: a bootstrap over the (fixed) test set (the seed-only intervals understate uncertainty about 5x) and conformal prediction, which promises a hit-rate as long as new data looks like the old.</a:t>
@@ -4900,7 +4900,7 @@
             <a:r>
               <a:rPr sz="3000" b="1">
                 <a:solidFill>
-                  <a:srgbClr val="1F3355"/>
+                  <a:srgbClr val="1F4E6B"/>
                 </a:solidFill>
               </a:rPr>
               <a:t>Models, confidence signals, and novelty detectors</a:t>
@@ -4938,7 +4938,7 @@
             <a:r>
               <a:rPr sz="1800">
                 <a:solidFill>
-                  <a:srgbClr val="1F3355"/>
+                  <a:srgbClr val="1F4E6B"/>
                 </a:solidFill>
               </a:rPr>
               <a:t>Detectors: logistic regression (a simple linear model), a random forest, and gradient boosting (both built from many decision trees), deliberately ordinary; the subject is their confidence, not the architecture.</a:t>
@@ -4953,7 +4953,7 @@
             <a:r>
               <a:rPr sz="1600">
                 <a:solidFill>
-                  <a:srgbClr val="555555"/>
+                  <a:srgbClr val="6B7079"/>
                 </a:solidFill>
               </a:rPr>
               <a:t>A neural MLP is added as a supplementary fourth family in the model summary, to check the confidence-ranking finding generalizes beyond trees and the linear model.</a:t>
@@ -4968,7 +4968,7 @@
             <a:r>
               <a:rPr sz="1800">
                 <a:solidFill>
-                  <a:srgbClr val="1F3355"/>
+                  <a:srgbClr val="1F4E6B"/>
                 </a:solidFill>
               </a:rPr>
               <a:t>Confidence signals compared: the top class probability (max-softmax), how much the forest’s trees disagree, and two “distance-from-normal” scores (Mahalanobis and nearest-neighbour).</a:t>
@@ -4983,7 +4983,7 @@
             <a:r>
               <a:rPr sz="1800">
                 <a:solidFill>
-                  <a:srgbClr val="1F3355"/>
+                  <a:srgbClr val="1F4E6B"/>
                 </a:solidFill>
               </a:rPr>
               <a:t>Novelty detectors, trained only on normal traffic to flag anything unusual: Isolation Forest and a one-class SVM.</a:t>
@@ -5027,7 +5027,7 @@
             <a:r>
               <a:rPr sz="3000" b="1">
                 <a:solidFill>
-                  <a:srgbClr val="1F3355"/>
+                  <a:srgbClr val="1F4E6B"/>
                 </a:solidFill>
               </a:rPr>
               <a:t>Experimental setup: datasets</a:t>
@@ -5065,7 +5065,7 @@
             <a:r>
               <a:rPr sz="1800">
                 <a:solidFill>
-                  <a:srgbClr val="1F3355"/>
+                  <a:srgbClr val="1F4E6B"/>
                 </a:solidFill>
               </a:rPr>
               <a:t>NSL-KDD: a public benchmark of network connections (~126k train / 22.5k test, 41 measured features each); attacks fall into four families: DoS (denial of service), Probe (network scanning), R2L (remote-to-local intrusion), and U2R (user-to-root escalation). Its test set deliberately includes attack types missing from training, a built-in unknown-attack test.</a:t>
@@ -5080,7 +5080,7 @@
             <a:r>
               <a:rPr sz="1800">
                 <a:solidFill>
-                  <a:srgbClr val="1F3355"/>
+                  <a:srgbClr val="1F4E6B"/>
                 </a:solidFill>
               </a:rPr>
               <a:t>CIC-IDS-2017: a newer dataset of network “flows” (per-connection summaries, 78 features), over three days (DDoS, PortScan, Web attacks).</a:t>
@@ -5095,7 +5095,7 @@
             <a:r>
               <a:rPr sz="1800">
                 <a:solidFill>
-                  <a:srgbClr val="1F3355"/>
+                  <a:srgbClr val="1F4E6B"/>
                 </a:solidFill>
               </a:rPr>
               <a:t>CSE-CIC-IDS-2018: a different network and year, used to test transfer on the 27 features the two datasets share by name.</a:t>
@@ -5110,7 +5110,7 @@
             <a:r>
               <a:rPr sz="1800">
                 <a:solidFill>
-                  <a:srgbClr val="1F3355"/>
+                  <a:srgbClr val="1F4E6B"/>
                 </a:solidFill>
               </a:rPr>
               <a:t>Each result averages many random repeats; the official test sets are kept fixed.</a:t>
@@ -5154,7 +5154,7 @@
             <a:r>
               <a:rPr sz="3000" b="1">
                 <a:solidFill>
-                  <a:srgbClr val="1F3355"/>
+                  <a:srgbClr val="1F4E6B"/>
                 </a:solidFill>
               </a:rPr>
               <a:t>Finding 1: the blind spot is a threshold failure, not indistinguishability</a:t>
@@ -5216,7 +5216,7 @@
             <a:r>
               <a:rPr sz="1600">
                 <a:solidFill>
-                  <a:srgbClr val="1F3355"/>
+                  <a:srgbClr val="1F4E6B"/>
                 </a:solidFill>
               </a:rPr>
               <a:t>The most attackable reading ('R2L is just an unbalanced classifier at the default cut') is wrong about the cause. The attack score separates R2L from normal well above chance (AUROC 0.87 seen, 0.80 unknown).</a:t>
@@ -5231,7 +5231,7 @@
             <a:r>
               <a:rPr sz="1600">
                 <a:solidFill>
-                  <a:srgbClr val="1F3355"/>
+                  <a:srgbClr val="1F4E6B"/>
                 </a:solidFill>
               </a:rPr>
               <a:t>At the global default threshold only 0.06 of R2L is flagged; class-balancing barely moves it (0.06); a per-family threshold recovers 0.49. So a single global operating point fails a minority, look-like-normal family.</a:t>
@@ -5246,7 +5246,7 @@
             <a:r>
               <a:rPr sz="1600">
                 <a:solidFill>
-                  <a:srgbClr val="1F3355"/>
+                  <a:srgbClr val="1F4E6B"/>
                 </a:solidFill>
               </a:rPr>
               <a:t>Threshold-free, holding a family out of training costs little AUROC (DoS -0.06, R2L -0.07), so the dramatic 'detection collapse' on unknown families is largely a thresholding artifact.</a:t>
@@ -5280,7 +5280,7 @@
             <a:r>
               <a:rPr sz="1200" i="1">
                 <a:solidFill>
-                  <a:srgbClr val="555555"/>
+                  <a:srgbClr val="6B7079"/>
                 </a:solidFill>
               </a:rPr>
               <a:t>Per-family detection AUROC (threshold-free), family seen vs. held out of training.</a:t>
@@ -5324,7 +5324,7 @@
             <a:r>
               <a:rPr sz="3000" b="1">
                 <a:solidFill>
-                  <a:srgbClr val="1F3355"/>
+                  <a:srgbClr val="1F4E6B"/>
                 </a:solidFill>
               </a:rPr>
               <a:t>Finding 2: over-confident under shift, and no calibrator fixes it</a:t>
@@ -5386,7 +5386,7 @@
             <a:r>
               <a:rPr sz="1600">
                 <a:solidFill>
-                  <a:srgbClr val="1F3355"/>
+                  <a:srgbClr val="1F4E6B"/>
                 </a:solidFill>
               </a:rPr>
               <a:t>On data like the training set the models are nearly perfectly calibrated (error below 0.01); on the real shifted test set it jumps to about 0.16-0.22.</a:t>
@@ -5401,7 +5401,7 @@
             <a:r>
               <a:rPr sz="1600">
                 <a:solidFill>
-                  <a:srgbClr val="1F3355"/>
+                  <a:srgbClr val="1F4E6B"/>
                 </a:solidFill>
               </a:rPr>
               <a:t>No post-hoc fix removes it: Platt, isotonic, and temperature scaling all stay high (every marker clusters at the top), each is fit on the source distribution.</a:t>
@@ -5416,7 +5416,7 @@
             <a:r>
               <a:rPr sz="1600">
                 <a:solidFill>
-                  <a:srgbClr val="1F3355"/>
+                  <a:srgbClr val="1F4E6B"/>
                 </a:solidFill>
               </a:rPr>
               <a:t>Source-calibrated probabilities do not certify the deployed distribution, which is why we turn to abstention (it needs only a usable confidence ranking).</a:t>
@@ -5450,7 +5450,7 @@
             <a:r>
               <a:rPr sz="1200" i="1">
                 <a:solidFill>
-                  <a:srgbClr val="555555"/>
+                  <a:srgbClr val="6B7079"/>
                 </a:solidFill>
               </a:rPr>
               <a:t>Calibration error on the shifted test set under four post-hoc calibrators (per model).</a:t>
@@ -5494,7 +5494,7 @@
             <a:r>
               <a:rPr sz="3000" b="1">
                 <a:solidFill>
-                  <a:srgbClr val="1F3355"/>
+                  <a:srgbClr val="1F4E6B"/>
                 </a:solidFill>
               </a:rPr>
               <a:t>Finding 3: abstaining helps, if confidence ranks errors</a:t>
@@ -5556,7 +5556,7 @@
             <a:r>
               <a:rPr sz="1600">
                 <a:solidFill>
-                  <a:srgbClr val="1F3355"/>
+                  <a:srgbClr val="1F4E6B"/>
                 </a:solidFill>
               </a:rPr>
               <a:t>Tree-based models: refusing the least-confident 20% cuts error 0.20 -&gt; 0.11 (area under the curve ~ 0.05; lower is better).</a:t>
@@ -5571,7 +5571,7 @@
             <a:r>
               <a:rPr sz="1600">
                 <a:solidFill>
-                  <a:srgbClr val="1F3355"/>
+                  <a:srgbClr val="1F4E6B"/>
                 </a:solidFill>
               </a:rPr>
               <a:t>The linear model’s confidence barely ranks its mistakes (area ~ 0.23), so abstaining buys little.</a:t>
@@ -5586,7 +5586,7 @@
             <a:r>
               <a:rPr sz="1600">
                 <a:solidFill>
-                  <a:srgbClr val="1F3355"/>
+                  <a:srgbClr val="1F4E6B"/>
                 </a:solidFill>
               </a:rPr>
               <a:t>Abstaining is only as good as the confidence signal behind it.</a:t>
@@ -5620,7 +5620,7 @@
             <a:r>
               <a:rPr sz="1200" i="1">
                 <a:solidFill>
-                  <a:srgbClr val="555555"/>
+                  <a:srgbClr val="6B7079"/>
                 </a:solidFill>
               </a:rPr>
               <a:t>Error among answered cases vs. the fraction answered; ring = the 80%-answered point.</a:t>
